--- a/fatf-rag 2/FATF-RAG_Presentation.pptx
+++ b/fatf-rag 2/FATF-RAG_Presentation.pptx
@@ -4,6 +4,9 @@
   <p:sldMasterIdLst>
     <p:sldMasterId id="2147483648" r:id="rId1"/>
   </p:sldMasterIdLst>
+  <p:notesMasterIdLst>
+    <p:notesMasterId r:id="rId12"/>
+  </p:notesMasterIdLst>
   <p:sldIdLst>
     <p:sldId id="256" r:id="rId2"/>
     <p:sldId id="257" r:id="rId3"/>
@@ -16,9 +19,6 @@
     <p:sldId id="264" r:id="rId10"/>
     <p:sldId id="265" r:id="rId11"/>
   </p:sldIdLst>
-  <p:notesMasterIdLst>
-    <p:notesMasterId r:id="rId12"/>
-  </p:notesMasterIdLst>
   <p:sldSz cx="12192000" cy="6858000"/>
   <p:notesSz cx="6858000" cy="12192000"/>
   <p:defaultTextStyle>
@@ -113,13 +113,20 @@
       </a:defRPr>
     </a:lvl9pPr>
   </p:defaultTextStyle>
+  <p:extLst>
+    <p:ext uri="{EFAFB233-063F-42B5-8137-9DF3F51BA10A}">
+      <p15:sldGuideLst xmlns:p15="http://schemas.microsoft.com/office/powerpoint/2012/main"/>
+    </p:ext>
+  </p:extLst>
 </p:presentation>
 </file>
 
 <file path=ppt/charts/chart1.xml><?xml version="1.0" encoding="utf-8"?>
-<c:chartSpace xmlns:c="http://schemas.openxmlformats.org/drawingml/2006/chart" xmlns:a="http://schemas.openxmlformats.org/drawingml/2006/main" xmlns:r="http://schemas.openxmlformats.org/officeDocument/2006/relationships">
+<c:chartSpace xmlns:c="http://schemas.openxmlformats.org/drawingml/2006/chart" xmlns:a="http://schemas.openxmlformats.org/drawingml/2006/main" xmlns:r="http://schemas.openxmlformats.org/officeDocument/2006/relationships" xmlns:c16r2="http://schemas.microsoft.com/office/drawing/2015/06/chart">
   <c:date1904 val="0"/>
+  <c:lang val="en-GB"/>
   <c:roundedCorners val="1"/>
+  <c:style val="2"/>
   <c:chart>
     <c:autoTitleDeleted val="1"/>
     <c:plotArea>
@@ -151,18 +158,26 @@
           <c:invertIfNegative val="0"/>
           <c:dLbls>
             <c:numFmt formatCode="0.00" sourceLinked="0"/>
+            <c:spPr>
+              <a:noFill/>
+              <a:ln>
+                <a:noFill/>
+              </a:ln>
+              <a:effectLst/>
+            </c:spPr>
             <c:txPr>
               <a:bodyPr/>
               <a:lstStyle/>
               <a:p>
                 <a:pPr>
-                  <a:defRPr b="1" i="0" strike="noStrike" sz="1200" u="none">
+                  <a:defRPr sz="1200" b="1" i="0" u="none" strike="noStrike">
                     <a:solidFill>
                       <a:srgbClr val="1E2A44"/>
                     </a:solidFill>
                     <a:latin typeface="Calibri"/>
                   </a:defRPr>
                 </a:pPr>
+                <a:endParaRPr lang="en-US"/>
               </a:p>
             </c:txPr>
             <c:showLegendKey val="0"/>
@@ -172,25 +187,28 @@
             <c:showPercent val="0"/>
             <c:showBubbleSize val="0"/>
             <c:showLeaderLines val="0"/>
+            <c:extLst>
+              <c:ext xmlns:c15="http://schemas.microsoft.com/office/drawing/2012/chart" uri="{CE6537A1-D6FC-4f65-9D91-7224C49458BB}">
+                <c15:showLeaderLines val="0"/>
+              </c:ext>
+            </c:extLst>
           </c:dLbls>
           <c:cat>
-            <c:multiLvlStrRef>
+            <c:strRef>
               <c:f>Sheet1!$A$2:$A$4</c:f>
-              <c:multiLvlStrCache>
+              <c:strCache>
                 <c:ptCount val="3"/>
-                <c:lvl>
-                  <c:pt idx="0">
-                    <c:v>Recall@5</c:v>
-                  </c:pt>
-                  <c:pt idx="1">
-                    <c:v>MRR</c:v>
-                  </c:pt>
-                  <c:pt idx="2">
-                    <c:v>Precision@5</c:v>
-                  </c:pt>
-                </c:lvl>
-              </c:multiLvlStrCache>
-            </c:multiLvlStrRef>
+                <c:pt idx="0">
+                  <c:v>Recall@5</c:v>
+                </c:pt>
+                <c:pt idx="1">
+                  <c:v>MRR</c:v>
+                </c:pt>
+                <c:pt idx="2">
+                  <c:v>Precision@5</c:v>
+                </c:pt>
+              </c:strCache>
+            </c:strRef>
           </c:cat>
           <c:val>
             <c:numRef>
@@ -210,36 +228,23 @@
               </c:numCache>
             </c:numRef>
           </c:val>
+          <c:extLst>
+            <c:ext xmlns:c16="http://schemas.microsoft.com/office/drawing/2014/chart" uri="{C3380CC4-5D6E-409C-BE32-E72D297353CC}">
+              <c16:uniqueId val="{00000000-CF62-FF46-9CB0-E695796B2AFA}"/>
+            </c:ext>
+          </c:extLst>
         </c:ser>
         <c:dLbls>
-          <c:numFmt formatCode="0.00" sourceLinked="0"/>
-          <c:txPr>
-            <a:bodyPr/>
-            <a:lstStyle/>
-            <a:p>
-              <a:pPr>
-                <a:defRPr b="1" i="0" strike="noStrike" sz="1200" u="none">
-                  <a:solidFill>
-                    <a:srgbClr val="1E2A44"/>
-                  </a:solidFill>
-                  <a:latin typeface="Calibri"/>
-                </a:defRPr>
-              </a:pPr>
-            </a:p>
-          </c:txPr>
           <c:showLegendKey val="0"/>
           <c:showVal val="1"/>
           <c:showCatName val="0"/>
           <c:showSerName val="0"/>
           <c:showPercent val="0"/>
           <c:showBubbleSize val="0"/>
-          <c:showLeaderLines val="0"/>
         </c:dLbls>
         <c:gapWidth val="150"/>
-        <c:overlap val="0"/>
         <c:axId val="2094734554"/>
         <c:axId val="2094734552"/>
-        <c:axId val="2094734556"/>
       </c:barChart>
       <c:catAx>
         <c:axId val="2094734554"/>
@@ -280,6 +285,7 @@
         <c:crosses val="autoZero"/>
         <c:auto val="1"/>
         <c:lblAlgn val="ctr"/>
+        <c:lblOffset val="100"/>
         <c:noMultiLvlLbl val="1"/>
       </c:catAx>
       <c:valAx>
@@ -344,6 +350,7 @@
     </c:plotArea>
     <c:plotVisOnly val="1"/>
     <c:dispBlanksAs val="span"/>
+    <c:showDLblsOverMax val="1"/>
   </c:chart>
   <c:spPr>
     <a:solidFill>
@@ -382,234 +389,10 @@
           <a:chExt cx="0" cy="0"/>
         </a:xfrm>
       </p:grpSpPr>
-      <p:sp>
-        <p:nvSpPr>
-          <p:cNvPr id="2" name="Header Placeholder 1"/>
-          <p:cNvSpPr>
-            <a:spLocks noGrp="1"/>
-          </p:cNvSpPr>
-          <p:nvPr>
-            <p:ph type="hdr" sz="quarter"/>
-          </p:nvPr>
-        </p:nvSpPr>
-        <p:spPr>
-          <a:xfrm>
-            <a:off x="0" y="0"/>
-            <a:ext cx="2971800" cy="458788"/>
-          </a:xfrm>
-          <a:prstGeom prst="rect">
-            <a:avLst/>
-          </a:prstGeom>
-        </p:spPr>
-        <p:txBody>
-          <a:bodyPr vert="horz" lIns="91440" tIns="45720" rIns="91440" bIns="45720" rtlCol="0"/>
-          <a:lstStyle>
-            <a:lvl1pPr algn="l">
-              <a:defRPr sz="1200"/>
-            </a:lvl1pPr>
-          </a:lstStyle>
-          <a:p>
-            <a:endParaRPr lang="en-US"/>
-          </a:p>
-        </p:txBody>
-      </p:sp>
-      <p:sp>
-        <p:nvSpPr>
-          <p:cNvPr id="3" name="Date Placeholder 2"/>
-          <p:cNvSpPr>
-            <a:spLocks noGrp="1"/>
-          </p:cNvSpPr>
-          <p:nvPr>
-            <p:ph type="dt" idx="1"/>
-          </p:nvPr>
-        </p:nvSpPr>
-        <p:spPr>
-          <a:xfrm>
-            <a:off x="3884613" y="0"/>
-            <a:ext cx="2971800" cy="458788"/>
-          </a:xfrm>
-          <a:prstGeom prst="rect">
-            <a:avLst/>
-          </a:prstGeom>
-        </p:spPr>
-        <p:txBody>
-          <a:bodyPr vert="horz" lIns="91440" tIns="45720" rIns="91440" bIns="45720" rtlCol="0"/>
-          <a:lstStyle>
-            <a:lvl1pPr algn="r">
-              <a:defRPr sz="1200"/>
-            </a:lvl1pPr>
-          </a:lstStyle>
-          <a:p>
-            <a:fld id="{5282F153-3F37-0F45-9E97-73ACFA13230C}" type="datetimeFigureOut">
-              <a:rPr lang="en-US"/>
-              <a:t>7/23/19</a:t>
-            </a:fld>
-            <a:endParaRPr lang="en-US"/>
-          </a:p>
-        </p:txBody>
-      </p:sp>
-      <p:sp>
-        <p:nvSpPr>
-          <p:cNvPr id="4" name="Slide Image Placeholder 3"/>
-          <p:cNvSpPr>
-            <a:spLocks noGrp="1" noRot="1" noChangeAspect="1"/>
-          </p:cNvSpPr>
-          <p:nvPr>
-            <p:ph type="sldImg" idx="2"/>
-          </p:nvPr>
-        </p:nvSpPr>
-        <p:spPr>
-          <a:xfrm>
-            <a:off x="685800" y="1143000"/>
-            <a:ext cx="5486400" cy="3086100"/>
-          </a:xfrm>
-          <a:prstGeom prst="rect">
-            <a:avLst/>
-          </a:prstGeom>
-          <a:noFill/>
-          <a:ln w="12700">
-            <a:solidFill>
-              <a:prstClr val="black"/>
-            </a:solidFill>
-          </a:ln>
-        </p:spPr>
-        <p:txBody>
-          <a:bodyPr vert="horz" lIns="91440" tIns="45720" rIns="91440" bIns="45720" rtlCol="0" anchor="ctr"/>
-          <a:lstStyle/>
-          <a:p>
-            <a:endParaRPr lang="en-US"/>
-          </a:p>
-        </p:txBody>
-      </p:sp>
-      <p:sp>
-        <p:nvSpPr>
-          <p:cNvPr id="5" name="Notes Placeholder 4"/>
-          <p:cNvSpPr>
-            <a:spLocks noGrp="1"/>
-          </p:cNvSpPr>
-          <p:nvPr>
-            <p:ph type="body" sz="quarter" idx="3"/>
-          </p:nvPr>
-        </p:nvSpPr>
-        <p:spPr>
-          <a:xfrm>
-            <a:off x="685800" y="4400550"/>
-            <a:ext cx="5486400" cy="3600450"/>
-          </a:xfrm>
-          <a:prstGeom prst="rect">
-            <a:avLst/>
-          </a:prstGeom>
-        </p:spPr>
-        <p:txBody>
-          <a:bodyPr vert="horz" lIns="91440" tIns="45720" rIns="91440" bIns="45720" rtlCol="0"/>
-          <a:lstStyle/>
-          <a:p>
-            <a:pPr lvl="0"/>
-            <a:r>
-              <a:rPr lang="en-US"/>
-              <a:t>Click to edit Master text styles</a:t>
-            </a:r>
-          </a:p>
-          <a:p>
-            <a:pPr lvl="1"/>
-            <a:r>
-              <a:rPr lang="en-US"/>
-              <a:t>Second level</a:t>
-            </a:r>
-          </a:p>
-          <a:p>
-            <a:pPr lvl="2"/>
-            <a:r>
-              <a:rPr lang="en-US"/>
-              <a:t>Third level</a:t>
-            </a:r>
-          </a:p>
-          <a:p>
-            <a:pPr lvl="3"/>
-            <a:r>
-              <a:rPr lang="en-US"/>
-              <a:t>Fourth level</a:t>
-            </a:r>
-          </a:p>
-          <a:p>
-            <a:pPr lvl="4"/>
-            <a:r>
-              <a:rPr lang="en-US"/>
-              <a:t>Fifth level</a:t>
-            </a:r>
-          </a:p>
-        </p:txBody>
-      </p:sp>
-      <p:sp>
-        <p:nvSpPr>
-          <p:cNvPr id="6" name="Footer Placeholder 5"/>
-          <p:cNvSpPr>
-            <a:spLocks noGrp="1"/>
-          </p:cNvSpPr>
-          <p:nvPr>
-            <p:ph type="ftr" sz="quarter" idx="4"/>
-          </p:nvPr>
-        </p:nvSpPr>
-        <p:spPr>
-          <a:xfrm>
-            <a:off x="0" y="8685213"/>
-            <a:ext cx="2971800" cy="458787"/>
-          </a:xfrm>
-          <a:prstGeom prst="rect">
-            <a:avLst/>
-          </a:prstGeom>
-        </p:spPr>
-        <p:txBody>
-          <a:bodyPr vert="horz" lIns="91440" tIns="45720" rIns="91440" bIns="45720" rtlCol="0" anchor="b"/>
-          <a:lstStyle>
-            <a:lvl1pPr algn="l">
-              <a:defRPr sz="1200"/>
-            </a:lvl1pPr>
-          </a:lstStyle>
-          <a:p>
-            <a:endParaRPr lang="en-US"/>
-          </a:p>
-        </p:txBody>
-      </p:sp>
-      <p:sp>
-        <p:nvSpPr>
-          <p:cNvPr id="7" name="Slide Number Placeholder 6"/>
-          <p:cNvSpPr>
-            <a:spLocks noGrp="1"/>
-          </p:cNvSpPr>
-          <p:nvPr>
-            <p:ph type="sldNum" sz="quarter" idx="5"/>
-          </p:nvPr>
-        </p:nvSpPr>
-        <p:spPr>
-          <a:xfrm>
-            <a:off x="3884613" y="8685213"/>
-            <a:ext cx="2971800" cy="458787"/>
-          </a:xfrm>
-          <a:prstGeom prst="rect">
-            <a:avLst/>
-          </a:prstGeom>
-        </p:spPr>
-        <p:txBody>
-          <a:bodyPr vert="horz" lIns="91440" tIns="45720" rIns="91440" bIns="45720" rtlCol="0" anchor="b"/>
-          <a:lstStyle>
-            <a:lvl1pPr algn="r">
-              <a:defRPr sz="1200"/>
-            </a:lvl1pPr>
-          </a:lstStyle>
-          <a:p>
-            <a:fld id="{CE5E9CC1-C706-0F49-92D6-E571CC5EEA8F}" type="slidenum">
-              <a:rPr lang="en-US"/>
-              <a:t>‹#›</a:t>
-            </a:fld>
-            <a:endParaRPr lang="en-US"/>
-          </a:p>
-        </p:txBody>
-      </p:sp>
     </p:spTree>
     <p:extLst>
       <p:ext uri="{BB962C8B-B14F-4D97-AF65-F5344CB8AC3E}">
-        <p14:creationId xmlns:p14="http://schemas.microsoft.com/office/powerpoint/2010/main" val="1024086991"/>
+        <p14:creationId xmlns:p14="http://schemas.microsoft.com/office/powerpoint/2010/main" val="566760808"/>
       </p:ext>
     </p:extLst>
   </p:cSld>
@@ -753,10 +536,6 @@
           <a:bodyPr/>
           <a:lstStyle/>
           <a:p>
-            <a:r>
-              <a:rPr lang="en-US" dirty="0"/>
-              <a:t/>
-            </a:r>
             <a:endParaRPr lang="en-US" dirty="0"/>
           </a:p>
         </p:txBody>
@@ -841,10 +620,6 @@
           <a:bodyPr/>
           <a:lstStyle/>
           <a:p>
-            <a:r>
-              <a:rPr lang="en-US" dirty="0"/>
-              <a:t/>
-            </a:r>
             <a:endParaRPr lang="en-US" dirty="0"/>
           </a:p>
         </p:txBody>
@@ -929,10 +704,6 @@
           <a:bodyPr/>
           <a:lstStyle/>
           <a:p>
-            <a:r>
-              <a:rPr lang="en-US" dirty="0"/>
-              <a:t/>
-            </a:r>
             <a:endParaRPr lang="en-US" dirty="0"/>
           </a:p>
         </p:txBody>
@@ -1017,10 +788,6 @@
           <a:bodyPr/>
           <a:lstStyle/>
           <a:p>
-            <a:r>
-              <a:rPr lang="en-US" dirty="0"/>
-              <a:t/>
-            </a:r>
             <a:endParaRPr lang="en-US" dirty="0"/>
           </a:p>
         </p:txBody>
@@ -1105,10 +872,6 @@
           <a:bodyPr/>
           <a:lstStyle/>
           <a:p>
-            <a:r>
-              <a:rPr lang="en-US" dirty="0"/>
-              <a:t/>
-            </a:r>
             <a:endParaRPr lang="en-US" dirty="0"/>
           </a:p>
         </p:txBody>
@@ -1193,10 +956,6 @@
           <a:bodyPr/>
           <a:lstStyle/>
           <a:p>
-            <a:r>
-              <a:rPr lang="en-US" dirty="0"/>
-              <a:t/>
-            </a:r>
             <a:endParaRPr lang="en-US" dirty="0"/>
           </a:p>
         </p:txBody>
@@ -1281,10 +1040,6 @@
           <a:bodyPr/>
           <a:lstStyle/>
           <a:p>
-            <a:r>
-              <a:rPr lang="en-US" dirty="0"/>
-              <a:t/>
-            </a:r>
             <a:endParaRPr lang="en-US" dirty="0"/>
           </a:p>
         </p:txBody>
@@ -1369,10 +1124,6 @@
           <a:bodyPr/>
           <a:lstStyle/>
           <a:p>
-            <a:r>
-              <a:rPr lang="en-US" dirty="0"/>
-              <a:t/>
-            </a:r>
             <a:endParaRPr lang="en-US" dirty="0"/>
           </a:p>
         </p:txBody>
@@ -1457,10 +1208,6 @@
           <a:bodyPr/>
           <a:lstStyle/>
           <a:p>
-            <a:r>
-              <a:rPr lang="en-US" dirty="0"/>
-              <a:t/>
-            </a:r>
             <a:endParaRPr lang="en-US" dirty="0"/>
           </a:p>
         </p:txBody>
@@ -1545,10 +1292,6 @@
           <a:bodyPr/>
           <a:lstStyle/>
           <a:p>
-            <a:r>
-              <a:rPr lang="en-US" dirty="0"/>
-              <a:t/>
-            </a:r>
             <a:endParaRPr lang="en-US" dirty="0"/>
           </a:p>
         </p:txBody>
@@ -1622,6 +1365,11 @@
 <file path=ppt/slideMasters/slideMaster1.xml><?xml version="1.0" encoding="utf-8"?>
 <p:sldMaster xmlns:a="http://schemas.openxmlformats.org/drawingml/2006/main" xmlns:r="http://schemas.openxmlformats.org/officeDocument/2006/relationships" xmlns:p="http://schemas.openxmlformats.org/presentationml/2006/main">
   <p:cSld>
+    <p:bg>
+      <p:bgRef idx="1001">
+        <a:schemeClr val="bg1"/>
+      </p:bgRef>
+    </p:bg>
     <p:spTree>
       <p:nvGrpSpPr>
         <p:cNvPr id="1" name=""/>
@@ -1904,6 +1652,7 @@
         <a:solidFill>
           <a:srgbClr val="1E2A44"/>
         </a:solidFill>
+        <a:effectLst/>
       </p:bgPr>
     </p:bg>
     <p:spTree>
@@ -1939,6 +1688,13 @@
           </a:solidFill>
           <a:ln/>
         </p:spPr>
+        <p:txBody>
+          <a:bodyPr/>
+          <a:lstStyle/>
+          <a:p>
+            <a:endParaRPr lang="en-US"/>
+          </a:p>
+        </p:txBody>
       </p:sp>
       <p:sp>
         <p:nvSpPr>
@@ -1961,7 +1717,7 @@
           <a:bodyPr wrap="square" lIns="0" tIns="0" rIns="0" bIns="0" rtlCol="0" anchor="ctr"/>
           <a:lstStyle/>
           <a:p>
-            <a:pPr indent="0" marL="0">
+            <a:pPr marL="0" indent="0">
               <a:buNone/>
             </a:pPr>
             <a:r>
@@ -2000,7 +1756,7 @@
           <a:bodyPr wrap="square" lIns="0" tIns="0" rIns="0" bIns="0" rtlCol="0" anchor="ctr"/>
           <a:lstStyle/>
           <a:p>
-            <a:pPr indent="0" marL="0">
+            <a:pPr marL="0" indent="0">
               <a:buNone/>
             </a:pPr>
             <a:r>
@@ -2039,7 +1795,7 @@
           <a:bodyPr wrap="square" lIns="0" tIns="0" rIns="0" bIns="0" rtlCol="0" anchor="ctr"/>
           <a:lstStyle/>
           <a:p>
-            <a:pPr indent="0" marL="0">
+            <a:pPr marL="0" indent="0">
               <a:lnSpc>
                 <a:spcPct val="130000"/>
               </a:lnSpc>
@@ -2059,7 +1815,7 @@
             <a:endParaRPr lang="en-US" sz="1300" dirty="0"/>
           </a:p>
           <a:p>
-            <a:pPr indent="0" marL="0">
+            <a:pPr marL="0" indent="0">
               <a:lnSpc>
                 <a:spcPct val="130000"/>
               </a:lnSpc>
@@ -2101,7 +1857,7 @@
           <a:bodyPr wrap="square" lIns="0" tIns="0" rIns="0" bIns="0" rtlCol="0" anchor="ctr"/>
           <a:lstStyle/>
           <a:p>
-            <a:pPr indent="0" marL="0">
+            <a:pPr marL="0" indent="0">
               <a:buNone/>
             </a:pPr>
             <a:r>
@@ -2135,6 +1891,7 @@
         <a:solidFill>
           <a:srgbClr val="1E2A44"/>
         </a:solidFill>
+        <a:effectLst/>
       </p:bgPr>
     </p:bg>
     <p:spTree>
@@ -2170,6 +1927,13 @@
           </a:solidFill>
           <a:ln/>
         </p:spPr>
+        <p:txBody>
+          <a:bodyPr/>
+          <a:lstStyle/>
+          <a:p>
+            <a:endParaRPr lang="en-US"/>
+          </a:p>
+        </p:txBody>
       </p:sp>
       <p:sp>
         <p:nvSpPr>
@@ -2192,7 +1956,7 @@
           <a:bodyPr wrap="square" lIns="0" tIns="0" rIns="0" bIns="0" rtlCol="0" anchor="ctr"/>
           <a:lstStyle/>
           <a:p>
-            <a:pPr indent="0" marL="0">
+            <a:pPr marL="0" indent="0">
               <a:buNone/>
             </a:pPr>
             <a:r>
@@ -2231,7 +1995,7 @@
           <a:bodyPr wrap="square" lIns="0" tIns="0" rIns="0" bIns="0" rtlCol="0" anchor="ctr"/>
           <a:lstStyle/>
           <a:p>
-            <a:pPr indent="0" marL="0">
+            <a:pPr marL="0" indent="0">
               <a:lnSpc>
                 <a:spcPct val="115000"/>
               </a:lnSpc>
@@ -2248,55 +2012,49 @@
               </a:rPr>
               <a:t>Deliverables.  </a:t>
             </a:r>
-            <a:pPr indent="0" marL="0">
+            <a:r>
+              <a:rPr lang="en-US" sz="1450" dirty="0">
+                <a:solidFill>
+                  <a:srgbClr val="C9D4E6"/>
+                </a:solidFill>
+                <a:latin typeface="Calibri" pitchFamily="34" charset="0"/>
+                <a:ea typeface="Calibri" pitchFamily="34" charset="-122"/>
+                <a:cs typeface="Calibri" pitchFamily="34" charset="-120"/>
+              </a:rPr>
+              <a:t>Git repo (source, requirements, README), reproducible notebook, CLI and Streamlit entry-points, and this deck.</a:t>
+            </a:r>
+            <a:endParaRPr lang="en-US" sz="1450" dirty="0"/>
+          </a:p>
+        </p:txBody>
+      </p:sp>
+      <p:sp>
+        <p:nvSpPr>
+          <p:cNvPr id="5" name="Text 3"/>
+          <p:cNvSpPr/>
+          <p:nvPr/>
+        </p:nvSpPr>
+        <p:spPr>
+          <a:xfrm>
+            <a:off x="640080" y="3200400"/>
+            <a:ext cx="10607040" cy="640080"/>
+          </a:xfrm>
+          <a:prstGeom prst="rect">
+            <a:avLst/>
+          </a:prstGeom>
+          <a:noFill/>
+          <a:ln/>
+        </p:spPr>
+        <p:txBody>
+          <a:bodyPr wrap="square" lIns="0" tIns="0" rIns="0" bIns="0" rtlCol="0" anchor="ctr"/>
+          <a:lstStyle/>
+          <a:p>
+            <a:pPr marL="0" indent="0">
               <a:lnSpc>
                 <a:spcPct val="115000"/>
               </a:lnSpc>
               <a:buNone/>
             </a:pPr>
             <a:r>
-              <a:rPr lang="en-US" sz="1450" dirty="0">
-                <a:solidFill>
-                  <a:srgbClr val="C9D4E6"/>
-                </a:solidFill>
-                <a:latin typeface="Calibri" pitchFamily="34" charset="0"/>
-                <a:ea typeface="Calibri" pitchFamily="34" charset="-122"/>
-                <a:cs typeface="Calibri" pitchFamily="34" charset="-120"/>
-              </a:rPr>
-              <a:t>Git repo (source, requirements, README), reproducible notebook, CLI and Streamlit entry-points, and this deck.</a:t>
-            </a:r>
-            <a:endParaRPr lang="en-US" sz="1450" dirty="0"/>
-          </a:p>
-        </p:txBody>
-      </p:sp>
-      <p:sp>
-        <p:nvSpPr>
-          <p:cNvPr id="5" name="Text 3"/>
-          <p:cNvSpPr/>
-          <p:nvPr/>
-        </p:nvSpPr>
-        <p:spPr>
-          <a:xfrm>
-            <a:off x="640080" y="3200400"/>
-            <a:ext cx="10607040" cy="640080"/>
-          </a:xfrm>
-          <a:prstGeom prst="rect">
-            <a:avLst/>
-          </a:prstGeom>
-          <a:noFill/>
-          <a:ln/>
-        </p:spPr>
-        <p:txBody>
-          <a:bodyPr wrap="square" lIns="0" tIns="0" rIns="0" bIns="0" rtlCol="0" anchor="ctr"/>
-          <a:lstStyle/>
-          <a:p>
-            <a:pPr indent="0" marL="0">
-              <a:lnSpc>
-                <a:spcPct val="115000"/>
-              </a:lnSpc>
-              <a:buNone/>
-            </a:pPr>
-            <a:r>
               <a:rPr lang="en-US" sz="1450" b="1" dirty="0">
                 <a:solidFill>
                   <a:srgbClr val="FFFFFF"/>
@@ -2307,12 +2065,6 @@
               </a:rPr>
               <a:t>Future work.  </a:t>
             </a:r>
-            <a:pPr indent="0" marL="0">
-              <a:lnSpc>
-                <a:spcPct val="115000"/>
-              </a:lnSpc>
-              <a:buNone/>
-            </a:pPr>
             <a:r>
               <a:rPr lang="en-US" sz="1450" dirty="0">
                 <a:solidFill>
@@ -2352,6 +2104,13 @@
             <a:prstDash val="solid"/>
           </a:ln>
         </p:spPr>
+        <p:txBody>
+          <a:bodyPr/>
+          <a:lstStyle/>
+          <a:p>
+            <a:endParaRPr lang="en-US"/>
+          </a:p>
+        </p:txBody>
       </p:sp>
       <p:sp>
         <p:nvSpPr>
@@ -2374,11 +2133,11 @@
           <a:bodyPr wrap="square" lIns="0" tIns="0" rIns="0" bIns="0" rtlCol="0" anchor="ctr"/>
           <a:lstStyle/>
           <a:p>
-            <a:pPr indent="0" marL="0">
+            <a:pPr marL="0" indent="0">
               <a:buNone/>
             </a:pPr>
             <a:r>
-              <a:rPr lang="en-US" sz="1200" b="1" spc="100" kern="0" dirty="0">
+              <a:rPr lang="en-US" sz="1200" b="1" kern="0" spc="100" dirty="0">
                 <a:solidFill>
                   <a:srgbClr val="4C6FA5"/>
                 </a:solidFill>
@@ -2413,7 +2172,7 @@
           <a:bodyPr wrap="square" lIns="0" tIns="0" rIns="0" bIns="0" rtlCol="0" anchor="ctr"/>
           <a:lstStyle/>
           <a:p>
-            <a:pPr indent="0" marL="0">
+            <a:pPr marL="0" indent="0">
               <a:lnSpc>
                 <a:spcPct val="112000"/>
               </a:lnSpc>
@@ -2455,7 +2214,7 @@
           <a:bodyPr wrap="square" lIns="0" tIns="0" rIns="0" bIns="0" rtlCol="0" anchor="ctr"/>
           <a:lstStyle/>
           <a:p>
-            <a:pPr indent="0" marL="0">
+            <a:pPr marL="0" indent="0">
               <a:buNone/>
             </a:pPr>
             <a:r>
@@ -2519,11 +2278,11 @@
           <a:bodyPr wrap="square" lIns="0" tIns="0" rIns="0" bIns="0" rtlCol="0" anchor="ctr"/>
           <a:lstStyle/>
           <a:p>
-            <a:pPr indent="0" marL="0">
+            <a:pPr marL="0" indent="0">
               <a:buNone/>
             </a:pPr>
             <a:r>
-              <a:rPr lang="en-US" sz="1200" b="1" spc="300" kern="0" dirty="0">
+              <a:rPr lang="en-US" sz="1200" b="1" kern="0" spc="300" dirty="0">
                 <a:solidFill>
                   <a:srgbClr val="4C6FA5"/>
                 </a:solidFill>
@@ -2558,7 +2317,7 @@
           <a:bodyPr wrap="square" lIns="0" tIns="0" rIns="0" bIns="0" rtlCol="0" anchor="ctr"/>
           <a:lstStyle/>
           <a:p>
-            <a:pPr indent="0" marL="0">
+            <a:pPr marL="0" indent="0">
               <a:buNone/>
             </a:pPr>
             <a:r>
@@ -2597,7 +2356,7 @@
           <a:bodyPr wrap="square" lIns="0" tIns="0" rIns="0" bIns="0" rtlCol="0" anchor="ctr"/>
           <a:lstStyle/>
           <a:p>
-            <a:pPr indent="0" marL="0">
+            <a:pPr marL="0" indent="0">
               <a:lnSpc>
                 <a:spcPct val="115000"/>
               </a:lnSpc>
@@ -2642,13 +2401,20 @@
             <a:prstDash val="solid"/>
           </a:ln>
           <a:effectLst>
-            <a:outerShdw sx="100000" sy="100000" kx="0" ky="0" algn="bl" rotWithShape="0" blurRad="88900" dist="38100" dir="8100000">
+            <a:outerShdw blurRad="88900" dist="38100" dir="8100000" algn="bl" rotWithShape="0">
               <a:srgbClr val="9AA5B5">
                 <a:alpha val="22000"/>
               </a:srgbClr>
             </a:outerShdw>
           </a:effectLst>
         </p:spPr>
+        <p:txBody>
+          <a:bodyPr/>
+          <a:lstStyle/>
+          <a:p>
+            <a:endParaRPr lang="en-US"/>
+          </a:p>
+        </p:txBody>
       </p:sp>
       <p:sp>
         <p:nvSpPr>
@@ -2674,13 +2440,20 @@
             <a:prstDash val="solid"/>
           </a:ln>
           <a:effectLst>
-            <a:outerShdw sx="100000" sy="100000" kx="0" ky="0" algn="bl" rotWithShape="0" blurRad="88900" dist="38100" dir="8100000">
+            <a:outerShdw blurRad="88900" dist="38100" dir="8100000" algn="bl" rotWithShape="0">
               <a:srgbClr val="9AA5B5">
                 <a:alpha val="22000"/>
               </a:srgbClr>
             </a:outerShdw>
           </a:effectLst>
         </p:spPr>
+        <p:txBody>
+          <a:bodyPr/>
+          <a:lstStyle/>
+          <a:p>
+            <a:endParaRPr lang="en-US"/>
+          </a:p>
+        </p:txBody>
       </p:sp>
       <p:sp>
         <p:nvSpPr>
@@ -2703,11 +2476,11 @@
           <a:bodyPr wrap="square" lIns="0" tIns="0" rIns="0" bIns="0" rtlCol="0" anchor="ctr"/>
           <a:lstStyle/>
           <a:p>
-            <a:pPr indent="0" marL="0">
+            <a:pPr marL="0" indent="0">
               <a:buNone/>
             </a:pPr>
             <a:r>
-              <a:rPr lang="en-US" sz="1200" b="1" spc="100" kern="0" dirty="0">
+              <a:rPr lang="en-US" sz="1200" b="1" kern="0" spc="100" dirty="0">
                 <a:solidFill>
                   <a:srgbClr val="4C6FA5"/>
                 </a:solidFill>
@@ -2742,7 +2515,7 @@
           <a:bodyPr wrap="square" lIns="0" tIns="0" rIns="0" bIns="0" rtlCol="0" anchor="ctr"/>
           <a:lstStyle/>
           <a:p>
-            <a:pPr indent="0" marL="0">
+            <a:pPr marL="0" indent="0">
               <a:buNone/>
             </a:pPr>
             <a:r>
@@ -2866,11 +2639,11 @@
           <a:bodyPr wrap="square" lIns="0" tIns="0" rIns="0" bIns="0" rtlCol="0" anchor="ctr"/>
           <a:lstStyle/>
           <a:p>
-            <a:pPr indent="0" marL="0">
+            <a:pPr marL="0" indent="0">
               <a:buNone/>
             </a:pPr>
             <a:r>
-              <a:rPr lang="en-US" sz="1200" b="1" spc="100" kern="0" dirty="0">
+              <a:rPr lang="en-US" sz="1200" b="1" kern="0" spc="100" dirty="0">
                 <a:solidFill>
                   <a:srgbClr val="4C6FA5"/>
                 </a:solidFill>
@@ -2905,7 +2678,7 @@
           <a:bodyPr wrap="square" lIns="0" tIns="0" rIns="0" bIns="0" rtlCol="0" anchor="ctr"/>
           <a:lstStyle/>
           <a:p>
-            <a:pPr indent="0" marL="0">
+            <a:pPr marL="0" indent="0">
               <a:lnSpc>
                 <a:spcPct val="110000"/>
               </a:lnSpc>
@@ -2922,14 +2695,50 @@
               </a:rPr>
               <a:t>Verifiability over fluency.  </a:t>
             </a:r>
-            <a:pPr indent="0" marL="0">
+            <a:r>
+              <a:rPr lang="en-US" sz="1350" dirty="0">
+                <a:solidFill>
+                  <a:srgbClr val="1F2933"/>
+                </a:solidFill>
+                <a:latin typeface="Calibri" pitchFamily="34" charset="0"/>
+                <a:ea typeface="Calibri" pitchFamily="34" charset="-122"/>
+                <a:cs typeface="Calibri" pitchFamily="34" charset="-120"/>
+              </a:rPr>
+              <a:t>A confident wrong answer is worse than “not in the sources.” Citations and page traceability are first-class features.</a:t>
+            </a:r>
+            <a:endParaRPr lang="en-US" sz="1350" dirty="0"/>
+          </a:p>
+        </p:txBody>
+      </p:sp>
+      <p:sp>
+        <p:nvSpPr>
+          <p:cNvPr id="12" name="Text 10"/>
+          <p:cNvSpPr/>
+          <p:nvPr/>
+        </p:nvSpPr>
+        <p:spPr>
+          <a:xfrm>
+            <a:off x="6537960" y="4251960"/>
+            <a:ext cx="4617720" cy="822960"/>
+          </a:xfrm>
+          <a:prstGeom prst="rect">
+            <a:avLst/>
+          </a:prstGeom>
+          <a:noFill/>
+          <a:ln/>
+        </p:spPr>
+        <p:txBody>
+          <a:bodyPr wrap="square" lIns="0" tIns="0" rIns="0" bIns="0" rtlCol="0" anchor="ctr"/>
+          <a:lstStyle/>
+          <a:p>
+            <a:pPr marL="0" indent="0">
               <a:lnSpc>
                 <a:spcPct val="110000"/>
               </a:lnSpc>
               <a:buNone/>
             </a:pPr>
             <a:r>
-              <a:rPr lang="en-US" sz="1350" dirty="0">
+              <a:rPr lang="en-US" sz="1350" b="1" dirty="0">
                 <a:solidFill>
                   <a:srgbClr val="1F2933"/>
                 </a:solidFill>
@@ -2937,56 +2746,8 @@
                 <a:ea typeface="Calibri" pitchFamily="34" charset="-122"/>
                 <a:cs typeface="Calibri" pitchFamily="34" charset="-120"/>
               </a:rPr>
-              <a:t>A confident wrong answer is worse than “not in the sources.” Citations and page traceability are first-class features.</a:t>
-            </a:r>
-            <a:endParaRPr lang="en-US" sz="1350" dirty="0"/>
-          </a:p>
-        </p:txBody>
-      </p:sp>
-      <p:sp>
-        <p:nvSpPr>
-          <p:cNvPr id="12" name="Text 10"/>
-          <p:cNvSpPr/>
-          <p:nvPr/>
-        </p:nvSpPr>
-        <p:spPr>
-          <a:xfrm>
-            <a:off x="6537960" y="4251960"/>
-            <a:ext cx="4617720" cy="822960"/>
-          </a:xfrm>
-          <a:prstGeom prst="rect">
-            <a:avLst/>
-          </a:prstGeom>
-          <a:noFill/>
-          <a:ln/>
-        </p:spPr>
-        <p:txBody>
-          <a:bodyPr wrap="square" lIns="0" tIns="0" rIns="0" bIns="0" rtlCol="0" anchor="ctr"/>
-          <a:lstStyle/>
-          <a:p>
-            <a:pPr indent="0" marL="0">
-              <a:lnSpc>
-                <a:spcPct val="110000"/>
-              </a:lnSpc>
-              <a:buNone/>
-            </a:pPr>
-            <a:r>
-              <a:rPr lang="en-US" sz="1350" b="1" dirty="0">
-                <a:solidFill>
-                  <a:srgbClr val="1F2933"/>
-                </a:solidFill>
-                <a:latin typeface="Calibri" pitchFamily="34" charset="0"/>
-                <a:ea typeface="Calibri" pitchFamily="34" charset="-122"/>
-                <a:cs typeface="Calibri" pitchFamily="34" charset="-120"/>
-              </a:rPr>
               <a:t>Robustness to query style.  </a:t>
             </a:r>
-            <a:pPr indent="0" marL="0">
-              <a:lnSpc>
-                <a:spcPct val="110000"/>
-              </a:lnSpc>
-              <a:buNone/>
-            </a:pPr>
             <a:r>
               <a:rPr lang="en-US" sz="1350" dirty="0">
                 <a:solidFill>
@@ -3023,7 +2784,7 @@
           <a:bodyPr wrap="square" lIns="0" tIns="0" rIns="0" bIns="0" rtlCol="0" anchor="ctr"/>
           <a:lstStyle/>
           <a:p>
-            <a:pPr indent="0" marL="0">
+            <a:pPr marL="0" indent="0">
               <a:buNone/>
             </a:pPr>
             <a:r>
@@ -3062,7 +2823,7 @@
           <a:bodyPr wrap="square" lIns="0" tIns="0" rIns="0" bIns="0" rtlCol="0" anchor="ctr"/>
           <a:lstStyle/>
           <a:p>
-            <a:pPr algn="r" indent="0" marL="0">
+            <a:pPr marL="0" indent="0" algn="r">
               <a:buNone/>
             </a:pPr>
             <a:r>
@@ -3126,11 +2887,11 @@
           <a:bodyPr wrap="square" lIns="0" tIns="0" rIns="0" bIns="0" rtlCol="0" anchor="ctr"/>
           <a:lstStyle/>
           <a:p>
-            <a:pPr indent="0" marL="0">
+            <a:pPr marL="0" indent="0">
               <a:buNone/>
             </a:pPr>
             <a:r>
-              <a:rPr lang="en-US" sz="1200" b="1" spc="300" kern="0" dirty="0">
+              <a:rPr lang="en-US" sz="1200" b="1" kern="0" spc="300" dirty="0">
                 <a:solidFill>
                   <a:srgbClr val="4C6FA5"/>
                 </a:solidFill>
@@ -3165,7 +2926,7 @@
           <a:bodyPr wrap="square" lIns="0" tIns="0" rIns="0" bIns="0" rtlCol="0" anchor="ctr"/>
           <a:lstStyle/>
           <a:p>
-            <a:pPr indent="0" marL="0">
+            <a:pPr marL="0" indent="0">
               <a:buNone/>
             </a:pPr>
             <a:r>
@@ -3209,13 +2970,20 @@
             <a:prstDash val="solid"/>
           </a:ln>
           <a:effectLst>
-            <a:outerShdw sx="100000" sy="100000" kx="0" ky="0" algn="bl" rotWithShape="0" blurRad="88900" dist="38100" dir="8100000">
+            <a:outerShdw blurRad="88900" dist="38100" dir="8100000" algn="bl" rotWithShape="0">
               <a:srgbClr val="9AA5B5">
                 <a:alpha val="22000"/>
               </a:srgbClr>
             </a:outerShdw>
           </a:effectLst>
         </p:spPr>
+        <p:txBody>
+          <a:bodyPr/>
+          <a:lstStyle/>
+          <a:p>
+            <a:endParaRPr lang="en-US"/>
+          </a:p>
+        </p:txBody>
       </p:sp>
       <p:sp>
         <p:nvSpPr>
@@ -3238,7 +3006,7 @@
           <a:bodyPr wrap="square" lIns="0" tIns="0" rIns="0" bIns="0" rtlCol="0" anchor="ctr"/>
           <a:lstStyle/>
           <a:p>
-            <a:pPr algn="ctr" indent="0" marL="0">
+            <a:pPr marL="0" indent="0" algn="ctr">
               <a:buNone/>
             </a:pPr>
             <a:r>
@@ -3255,7 +3023,7 @@
             <a:endParaRPr lang="en-US" sz="1300" dirty="0"/>
           </a:p>
           <a:p>
-            <a:pPr algn="ctr" indent="0" marL="0">
+            <a:pPr marL="0" indent="0" algn="ctr">
               <a:buNone/>
             </a:pPr>
             <a:r>
@@ -3294,7 +3062,7 @@
           <a:bodyPr wrap="square" lIns="0" tIns="0" rIns="0" bIns="0" rtlCol="0" anchor="ctr"/>
           <a:lstStyle/>
           <a:p>
-            <a:pPr algn="ctr" indent="0" marL="0">
+            <a:pPr marL="0" indent="0" algn="ctr">
               <a:buNone/>
             </a:pPr>
             <a:r>
@@ -3338,13 +3106,20 @@
             <a:prstDash val="solid"/>
           </a:ln>
           <a:effectLst>
-            <a:outerShdw sx="100000" sy="100000" kx="0" ky="0" algn="bl" rotWithShape="0" blurRad="88900" dist="38100" dir="8100000">
+            <a:outerShdw blurRad="88900" dist="38100" dir="8100000" algn="bl" rotWithShape="0">
               <a:srgbClr val="9AA5B5">
                 <a:alpha val="22000"/>
               </a:srgbClr>
             </a:outerShdw>
           </a:effectLst>
         </p:spPr>
+        <p:txBody>
+          <a:bodyPr/>
+          <a:lstStyle/>
+          <a:p>
+            <a:endParaRPr lang="en-US"/>
+          </a:p>
+        </p:txBody>
       </p:sp>
       <p:sp>
         <p:nvSpPr>
@@ -3367,7 +3142,7 @@
           <a:bodyPr wrap="square" lIns="0" tIns="0" rIns="0" bIns="0" rtlCol="0" anchor="ctr"/>
           <a:lstStyle/>
           <a:p>
-            <a:pPr algn="ctr" indent="0" marL="0">
+            <a:pPr marL="0" indent="0" algn="ctr">
               <a:buNone/>
             </a:pPr>
             <a:r>
@@ -3384,7 +3159,7 @@
             <a:endParaRPr lang="en-US" sz="1300" dirty="0"/>
           </a:p>
           <a:p>
-            <a:pPr algn="ctr" indent="0" marL="0">
+            <a:pPr marL="0" indent="0" algn="ctr">
               <a:buNone/>
             </a:pPr>
             <a:r>
@@ -3423,7 +3198,7 @@
           <a:bodyPr wrap="square" lIns="0" tIns="0" rIns="0" bIns="0" rtlCol="0" anchor="ctr"/>
           <a:lstStyle/>
           <a:p>
-            <a:pPr algn="ctr" indent="0" marL="0">
+            <a:pPr marL="0" indent="0" algn="ctr">
               <a:buNone/>
             </a:pPr>
             <a:r>
@@ -3467,13 +3242,20 @@
             <a:prstDash val="solid"/>
           </a:ln>
           <a:effectLst>
-            <a:outerShdw sx="100000" sy="100000" kx="0" ky="0" algn="bl" rotWithShape="0" blurRad="88900" dist="38100" dir="8100000">
+            <a:outerShdw blurRad="88900" dist="38100" dir="8100000" algn="bl" rotWithShape="0">
               <a:srgbClr val="9AA5B5">
                 <a:alpha val="22000"/>
               </a:srgbClr>
             </a:outerShdw>
           </a:effectLst>
         </p:spPr>
+        <p:txBody>
+          <a:bodyPr/>
+          <a:lstStyle/>
+          <a:p>
+            <a:endParaRPr lang="en-US"/>
+          </a:p>
+        </p:txBody>
       </p:sp>
       <p:sp>
         <p:nvSpPr>
@@ -3496,7 +3278,7 @@
           <a:bodyPr wrap="square" lIns="0" tIns="0" rIns="0" bIns="0" rtlCol="0" anchor="ctr"/>
           <a:lstStyle/>
           <a:p>
-            <a:pPr algn="ctr" indent="0" marL="0">
+            <a:pPr marL="0" indent="0" algn="ctr">
               <a:buNone/>
             </a:pPr>
             <a:r>
@@ -3513,7 +3295,7 @@
             <a:endParaRPr lang="en-US" sz="1300" dirty="0"/>
           </a:p>
           <a:p>
-            <a:pPr algn="ctr" indent="0" marL="0">
+            <a:pPr marL="0" indent="0" algn="ctr">
               <a:buNone/>
             </a:pPr>
             <a:r>
@@ -3552,7 +3334,7 @@
           <a:bodyPr wrap="square" lIns="0" tIns="0" rIns="0" bIns="0" rtlCol="0" anchor="ctr"/>
           <a:lstStyle/>
           <a:p>
-            <a:pPr algn="ctr" indent="0" marL="0">
+            <a:pPr marL="0" indent="0" algn="ctr">
               <a:buNone/>
             </a:pPr>
             <a:r>
@@ -3596,13 +3378,20 @@
             <a:prstDash val="solid"/>
           </a:ln>
           <a:effectLst>
-            <a:outerShdw sx="100000" sy="100000" kx="0" ky="0" algn="bl" rotWithShape="0" blurRad="88900" dist="38100" dir="8100000">
+            <a:outerShdw blurRad="88900" dist="38100" dir="8100000" algn="bl" rotWithShape="0">
               <a:srgbClr val="9AA5B5">
                 <a:alpha val="22000"/>
               </a:srgbClr>
             </a:outerShdw>
           </a:effectLst>
         </p:spPr>
+        <p:txBody>
+          <a:bodyPr/>
+          <a:lstStyle/>
+          <a:p>
+            <a:endParaRPr lang="en-US"/>
+          </a:p>
+        </p:txBody>
       </p:sp>
       <p:sp>
         <p:nvSpPr>
@@ -3625,7 +3414,7 @@
           <a:bodyPr wrap="square" lIns="0" tIns="0" rIns="0" bIns="0" rtlCol="0" anchor="ctr"/>
           <a:lstStyle/>
           <a:p>
-            <a:pPr algn="ctr" indent="0" marL="0">
+            <a:pPr marL="0" indent="0" algn="ctr">
               <a:buNone/>
             </a:pPr>
             <a:r>
@@ -3642,7 +3431,7 @@
             <a:endParaRPr lang="en-US" sz="1300" dirty="0"/>
           </a:p>
           <a:p>
-            <a:pPr algn="ctr" indent="0" marL="0">
+            <a:pPr marL="0" indent="0" algn="ctr">
               <a:buNone/>
             </a:pPr>
             <a:r>
@@ -3681,7 +3470,7 @@
           <a:bodyPr wrap="square" lIns="0" tIns="0" rIns="0" bIns="0" rtlCol="0" anchor="ctr"/>
           <a:lstStyle/>
           <a:p>
-            <a:pPr algn="ctr" indent="0" marL="0">
+            <a:pPr marL="0" indent="0" algn="ctr">
               <a:buNone/>
             </a:pPr>
             <a:r>
@@ -3725,13 +3514,20 @@
             <a:prstDash val="solid"/>
           </a:ln>
           <a:effectLst>
-            <a:outerShdw sx="100000" sy="100000" kx="0" ky="0" algn="bl" rotWithShape="0" blurRad="88900" dist="38100" dir="8100000">
+            <a:outerShdw blurRad="88900" dist="38100" dir="8100000" algn="bl" rotWithShape="0">
               <a:srgbClr val="9AA5B5">
                 <a:alpha val="22000"/>
               </a:srgbClr>
             </a:outerShdw>
           </a:effectLst>
         </p:spPr>
+        <p:txBody>
+          <a:bodyPr/>
+          <a:lstStyle/>
+          <a:p>
+            <a:endParaRPr lang="en-US"/>
+          </a:p>
+        </p:txBody>
       </p:sp>
       <p:sp>
         <p:nvSpPr>
@@ -3754,7 +3550,7 @@
           <a:bodyPr wrap="square" lIns="0" tIns="0" rIns="0" bIns="0" rtlCol="0" anchor="ctr"/>
           <a:lstStyle/>
           <a:p>
-            <a:pPr algn="ctr" indent="0" marL="0">
+            <a:pPr marL="0" indent="0" algn="ctr">
               <a:buNone/>
             </a:pPr>
             <a:r>
@@ -3771,7 +3567,7 @@
             <a:endParaRPr lang="en-US" sz="1300" dirty="0"/>
           </a:p>
           <a:p>
-            <a:pPr algn="ctr" indent="0" marL="0">
+            <a:pPr marL="0" indent="0" algn="ctr">
               <a:buNone/>
             </a:pPr>
             <a:r>
@@ -3810,7 +3606,7 @@
           <a:bodyPr wrap="square" lIns="0" tIns="0" rIns="0" bIns="0" rtlCol="0" anchor="ctr"/>
           <a:lstStyle/>
           <a:p>
-            <a:pPr algn="ctr" indent="0" marL="0">
+            <a:pPr marL="0" indent="0" algn="ctr">
               <a:buNone/>
             </a:pPr>
             <a:r>
@@ -3854,13 +3650,20 @@
             <a:prstDash val="solid"/>
           </a:ln>
           <a:effectLst>
-            <a:outerShdw sx="100000" sy="100000" kx="0" ky="0" algn="bl" rotWithShape="0" blurRad="88900" dist="38100" dir="8100000">
+            <a:outerShdw blurRad="88900" dist="38100" dir="8100000" algn="bl" rotWithShape="0">
               <a:srgbClr val="9AA5B5">
                 <a:alpha val="22000"/>
               </a:srgbClr>
             </a:outerShdw>
           </a:effectLst>
         </p:spPr>
+        <p:txBody>
+          <a:bodyPr/>
+          <a:lstStyle/>
+          <a:p>
+            <a:endParaRPr lang="en-US"/>
+          </a:p>
+        </p:txBody>
       </p:sp>
       <p:sp>
         <p:nvSpPr>
@@ -3883,7 +3686,7 @@
           <a:bodyPr wrap="square" lIns="0" tIns="0" rIns="0" bIns="0" rtlCol="0" anchor="ctr"/>
           <a:lstStyle/>
           <a:p>
-            <a:pPr algn="ctr" indent="0" marL="0">
+            <a:pPr marL="0" indent="0" algn="ctr">
               <a:buNone/>
             </a:pPr>
             <a:r>
@@ -3900,7 +3703,7 @@
             <a:endParaRPr lang="en-US" sz="1300" dirty="0"/>
           </a:p>
           <a:p>
-            <a:pPr algn="ctr" indent="0" marL="0">
+            <a:pPr marL="0" indent="0" algn="ctr">
               <a:buNone/>
             </a:pPr>
             <a:r>
@@ -3939,7 +3742,7 @@
           <a:bodyPr wrap="square" lIns="0" tIns="0" rIns="0" bIns="0" rtlCol="0" anchor="ctr"/>
           <a:lstStyle/>
           <a:p>
-            <a:pPr algn="ctr" indent="0" marL="0">
+            <a:pPr marL="0" indent="0" algn="ctr">
               <a:buNone/>
             </a:pPr>
             <a:r>
@@ -3981,13 +3784,20 @@
             <a:prstDash val="solid"/>
           </a:ln>
           <a:effectLst>
-            <a:outerShdw sx="100000" sy="100000" kx="0" ky="0" algn="bl" rotWithShape="0" blurRad="88900" dist="38100" dir="8100000">
+            <a:outerShdw blurRad="88900" dist="38100" dir="8100000" algn="bl" rotWithShape="0">
               <a:srgbClr val="9AA5B5">
                 <a:alpha val="22000"/>
               </a:srgbClr>
             </a:outerShdw>
           </a:effectLst>
         </p:spPr>
+        <p:txBody>
+          <a:bodyPr/>
+          <a:lstStyle/>
+          <a:p>
+            <a:endParaRPr lang="en-US"/>
+          </a:p>
+        </p:txBody>
       </p:sp>
       <p:sp>
         <p:nvSpPr>
@@ -4010,7 +3820,7 @@
           <a:bodyPr wrap="square" lIns="0" tIns="0" rIns="0" bIns="0" rtlCol="0" anchor="ctr"/>
           <a:lstStyle/>
           <a:p>
-            <a:pPr indent="0" marL="0">
+            <a:pPr marL="0" indent="0">
               <a:buNone/>
             </a:pPr>
             <a:r>
@@ -4049,7 +3859,7 @@
           <a:bodyPr wrap="square" lIns="0" tIns="0" rIns="0" bIns="0" rtlCol="0" anchor="ctr"/>
           <a:lstStyle/>
           <a:p>
-            <a:pPr indent="0" marL="0">
+            <a:pPr marL="0" indent="0">
               <a:lnSpc>
                 <a:spcPct val="110000"/>
               </a:lnSpc>
@@ -4094,13 +3904,20 @@
             <a:prstDash val="solid"/>
           </a:ln>
           <a:effectLst>
-            <a:outerShdw sx="100000" sy="100000" kx="0" ky="0" algn="bl" rotWithShape="0" blurRad="88900" dist="38100" dir="8100000">
+            <a:outerShdw blurRad="88900" dist="38100" dir="8100000" algn="bl" rotWithShape="0">
               <a:srgbClr val="9AA5B5">
                 <a:alpha val="22000"/>
               </a:srgbClr>
             </a:outerShdw>
           </a:effectLst>
         </p:spPr>
+        <p:txBody>
+          <a:bodyPr/>
+          <a:lstStyle/>
+          <a:p>
+            <a:endParaRPr lang="en-US"/>
+          </a:p>
+        </p:txBody>
       </p:sp>
       <p:sp>
         <p:nvSpPr>
@@ -4123,7 +3940,7 @@
           <a:bodyPr wrap="square" lIns="0" tIns="0" rIns="0" bIns="0" rtlCol="0" anchor="ctr"/>
           <a:lstStyle/>
           <a:p>
-            <a:pPr indent="0" marL="0">
+            <a:pPr marL="0" indent="0">
               <a:buNone/>
             </a:pPr>
             <a:r>
@@ -4162,7 +3979,7 @@
           <a:bodyPr wrap="square" lIns="0" tIns="0" rIns="0" bIns="0" rtlCol="0" anchor="ctr"/>
           <a:lstStyle/>
           <a:p>
-            <a:pPr indent="0" marL="0">
+            <a:pPr marL="0" indent="0">
               <a:lnSpc>
                 <a:spcPct val="110000"/>
               </a:lnSpc>
@@ -4207,13 +4024,20 @@
             <a:prstDash val="solid"/>
           </a:ln>
           <a:effectLst>
-            <a:outerShdw sx="100000" sy="100000" kx="0" ky="0" algn="bl" rotWithShape="0" blurRad="88900" dist="38100" dir="8100000">
+            <a:outerShdw blurRad="88900" dist="38100" dir="8100000" algn="bl" rotWithShape="0">
               <a:srgbClr val="9AA5B5">
                 <a:alpha val="22000"/>
               </a:srgbClr>
             </a:outerShdw>
           </a:effectLst>
         </p:spPr>
+        <p:txBody>
+          <a:bodyPr/>
+          <a:lstStyle/>
+          <a:p>
+            <a:endParaRPr lang="en-US"/>
+          </a:p>
+        </p:txBody>
       </p:sp>
       <p:sp>
         <p:nvSpPr>
@@ -4236,7 +4060,7 @@
           <a:bodyPr wrap="square" lIns="0" tIns="0" rIns="0" bIns="0" rtlCol="0" anchor="ctr"/>
           <a:lstStyle/>
           <a:p>
-            <a:pPr indent="0" marL="0">
+            <a:pPr marL="0" indent="0">
               <a:buNone/>
             </a:pPr>
             <a:r>
@@ -4275,7 +4099,7 @@
           <a:bodyPr wrap="square" lIns="0" tIns="0" rIns="0" bIns="0" rtlCol="0" anchor="ctr"/>
           <a:lstStyle/>
           <a:p>
-            <a:pPr indent="0" marL="0">
+            <a:pPr marL="0" indent="0">
               <a:lnSpc>
                 <a:spcPct val="110000"/>
               </a:lnSpc>
@@ -4317,7 +4141,7 @@
           <a:bodyPr wrap="square" lIns="0" tIns="0" rIns="0" bIns="0" rtlCol="0" anchor="ctr"/>
           <a:lstStyle/>
           <a:p>
-            <a:pPr indent="0" marL="0">
+            <a:pPr marL="0" indent="0">
               <a:buNone/>
             </a:pPr>
             <a:r>
@@ -4356,7 +4180,7 @@
           <a:bodyPr wrap="square" lIns="0" tIns="0" rIns="0" bIns="0" rtlCol="0" anchor="ctr"/>
           <a:lstStyle/>
           <a:p>
-            <a:pPr algn="r" indent="0" marL="0">
+            <a:pPr marL="0" indent="0" algn="r">
               <a:buNone/>
             </a:pPr>
             <a:r>
@@ -4420,11 +4244,11 @@
           <a:bodyPr wrap="square" lIns="0" tIns="0" rIns="0" bIns="0" rtlCol="0" anchor="ctr"/>
           <a:lstStyle/>
           <a:p>
-            <a:pPr indent="0" marL="0">
+            <a:pPr marL="0" indent="0">
               <a:buNone/>
             </a:pPr>
             <a:r>
-              <a:rPr lang="en-US" sz="1200" b="1" spc="300" kern="0" dirty="0">
+              <a:rPr lang="en-US" sz="1200" b="1" kern="0" spc="300" dirty="0">
                 <a:solidFill>
                   <a:srgbClr val="4C6FA5"/>
                 </a:solidFill>
@@ -4459,7 +4283,7 @@
           <a:bodyPr wrap="square" lIns="0" tIns="0" rIns="0" bIns="0" rtlCol="0" anchor="ctr"/>
           <a:lstStyle/>
           <a:p>
-            <a:pPr indent="0" marL="0">
+            <a:pPr marL="0" indent="0">
               <a:buNone/>
             </a:pPr>
             <a:r>
@@ -4496,6 +4320,13 @@
           </a:solidFill>
           <a:ln/>
         </p:spPr>
+        <p:txBody>
+          <a:bodyPr/>
+          <a:lstStyle/>
+          <a:p>
+            <a:endParaRPr lang="en-US"/>
+          </a:p>
+        </p:txBody>
       </p:sp>
       <p:sp>
         <p:nvSpPr>
@@ -4518,7 +4349,7 @@
           <a:bodyPr wrap="square" lIns="0" tIns="0" rIns="0" bIns="0" rtlCol="0" anchor="ctr"/>
           <a:lstStyle/>
           <a:p>
-            <a:pPr indent="0" marL="0">
+            <a:pPr marL="0" indent="0">
               <a:buNone/>
             </a:pPr>
             <a:r>
@@ -4557,7 +4388,7 @@
           <a:bodyPr wrap="square" lIns="0" tIns="0" rIns="0" bIns="0" rtlCol="0" anchor="ctr"/>
           <a:lstStyle/>
           <a:p>
-            <a:pPr indent="0" marL="0">
+            <a:pPr marL="0" indent="0">
               <a:lnSpc>
                 <a:spcPct val="108000"/>
               </a:lnSpc>
@@ -4597,6 +4428,13 @@
           </a:solidFill>
           <a:ln/>
         </p:spPr>
+        <p:txBody>
+          <a:bodyPr/>
+          <a:lstStyle/>
+          <a:p>
+            <a:endParaRPr lang="en-US"/>
+          </a:p>
+        </p:txBody>
       </p:sp>
       <p:sp>
         <p:nvSpPr>
@@ -4619,7 +4457,7 @@
           <a:bodyPr wrap="square" lIns="0" tIns="0" rIns="0" bIns="0" rtlCol="0" anchor="ctr"/>
           <a:lstStyle/>
           <a:p>
-            <a:pPr indent="0" marL="0">
+            <a:pPr marL="0" indent="0">
               <a:buNone/>
             </a:pPr>
             <a:r>
@@ -4658,7 +4496,7 @@
           <a:bodyPr wrap="square" lIns="0" tIns="0" rIns="0" bIns="0" rtlCol="0" anchor="ctr"/>
           <a:lstStyle/>
           <a:p>
-            <a:pPr indent="0" marL="0">
+            <a:pPr marL="0" indent="0">
               <a:lnSpc>
                 <a:spcPct val="108000"/>
               </a:lnSpc>
@@ -4698,6 +4536,13 @@
           </a:solidFill>
           <a:ln/>
         </p:spPr>
+        <p:txBody>
+          <a:bodyPr/>
+          <a:lstStyle/>
+          <a:p>
+            <a:endParaRPr lang="en-US"/>
+          </a:p>
+        </p:txBody>
       </p:sp>
       <p:sp>
         <p:nvSpPr>
@@ -4720,7 +4565,7 @@
           <a:bodyPr wrap="square" lIns="0" tIns="0" rIns="0" bIns="0" rtlCol="0" anchor="ctr"/>
           <a:lstStyle/>
           <a:p>
-            <a:pPr indent="0" marL="0">
+            <a:pPr marL="0" indent="0">
               <a:buNone/>
             </a:pPr>
             <a:r>
@@ -4759,7 +4604,7 @@
           <a:bodyPr wrap="square" lIns="0" tIns="0" rIns="0" bIns="0" rtlCol="0" anchor="ctr"/>
           <a:lstStyle/>
           <a:p>
-            <a:pPr indent="0" marL="0">
+            <a:pPr marL="0" indent="0">
               <a:lnSpc>
                 <a:spcPct val="108000"/>
               </a:lnSpc>
@@ -4799,6 +4644,13 @@
           </a:solidFill>
           <a:ln/>
         </p:spPr>
+        <p:txBody>
+          <a:bodyPr/>
+          <a:lstStyle/>
+          <a:p>
+            <a:endParaRPr lang="en-US"/>
+          </a:p>
+        </p:txBody>
       </p:sp>
       <p:sp>
         <p:nvSpPr>
@@ -4821,7 +4673,7 @@
           <a:bodyPr wrap="square" lIns="0" tIns="0" rIns="0" bIns="0" rtlCol="0" anchor="ctr"/>
           <a:lstStyle/>
           <a:p>
-            <a:pPr indent="0" marL="0">
+            <a:pPr marL="0" indent="0">
               <a:buNone/>
             </a:pPr>
             <a:r>
@@ -4860,7 +4712,7 @@
           <a:bodyPr wrap="square" lIns="0" tIns="0" rIns="0" bIns="0" rtlCol="0" anchor="ctr"/>
           <a:lstStyle/>
           <a:p>
-            <a:pPr indent="0" marL="0">
+            <a:pPr marL="0" indent="0">
               <a:lnSpc>
                 <a:spcPct val="108000"/>
               </a:lnSpc>
@@ -4900,6 +4752,13 @@
           </a:solidFill>
           <a:ln/>
         </p:spPr>
+        <p:txBody>
+          <a:bodyPr/>
+          <a:lstStyle/>
+          <a:p>
+            <a:endParaRPr lang="en-US"/>
+          </a:p>
+        </p:txBody>
       </p:sp>
       <p:sp>
         <p:nvSpPr>
@@ -4922,7 +4781,7 @@
           <a:bodyPr wrap="square" lIns="0" tIns="0" rIns="0" bIns="0" rtlCol="0" anchor="ctr"/>
           <a:lstStyle/>
           <a:p>
-            <a:pPr indent="0" marL="0">
+            <a:pPr marL="0" indent="0">
               <a:buNone/>
             </a:pPr>
             <a:r>
@@ -4961,7 +4820,7 @@
           <a:bodyPr wrap="square" lIns="0" tIns="0" rIns="0" bIns="0" rtlCol="0" anchor="ctr"/>
           <a:lstStyle/>
           <a:p>
-            <a:pPr indent="0" marL="0">
+            <a:pPr marL="0" indent="0">
               <a:lnSpc>
                 <a:spcPct val="108000"/>
               </a:lnSpc>
@@ -5003,7 +4862,7 @@
           <a:bodyPr wrap="square" lIns="0" tIns="0" rIns="0" bIns="0" rtlCol="0" anchor="ctr"/>
           <a:lstStyle/>
           <a:p>
-            <a:pPr indent="0" marL="0">
+            <a:pPr marL="0" indent="0">
               <a:buNone/>
             </a:pPr>
             <a:r>
@@ -5042,7 +4901,7 @@
           <a:bodyPr wrap="square" lIns="0" tIns="0" rIns="0" bIns="0" rtlCol="0" anchor="ctr"/>
           <a:lstStyle/>
           <a:p>
-            <a:pPr algn="r" indent="0" marL="0">
+            <a:pPr marL="0" indent="0" algn="r">
               <a:buNone/>
             </a:pPr>
             <a:r>
@@ -5106,11 +4965,11 @@
           <a:bodyPr wrap="square" lIns="0" tIns="0" rIns="0" bIns="0" rtlCol="0" anchor="ctr"/>
           <a:lstStyle/>
           <a:p>
-            <a:pPr indent="0" marL="0">
+            <a:pPr marL="0" indent="0">
               <a:buNone/>
             </a:pPr>
             <a:r>
-              <a:rPr lang="en-US" sz="1200" b="1" spc="300" kern="0" dirty="0">
+              <a:rPr lang="en-US" sz="1200" b="1" kern="0" spc="300" dirty="0">
                 <a:solidFill>
                   <a:srgbClr val="4C6FA5"/>
                 </a:solidFill>
@@ -5145,7 +5004,7 @@
           <a:bodyPr wrap="square" lIns="0" tIns="0" rIns="0" bIns="0" rtlCol="0" anchor="ctr"/>
           <a:lstStyle/>
           <a:p>
-            <a:pPr indent="0" marL="0">
+            <a:pPr marL="0" indent="0">
               <a:buNone/>
             </a:pPr>
             <a:r>
@@ -5187,13 +5046,20 @@
             <a:prstDash val="solid"/>
           </a:ln>
           <a:effectLst>
-            <a:outerShdw sx="100000" sy="100000" kx="0" ky="0" algn="bl" rotWithShape="0" blurRad="88900" dist="38100" dir="8100000">
+            <a:outerShdw blurRad="88900" dist="38100" dir="8100000" algn="bl" rotWithShape="0">
               <a:srgbClr val="9AA5B5">
                 <a:alpha val="22000"/>
               </a:srgbClr>
             </a:outerShdw>
           </a:effectLst>
         </p:spPr>
+        <p:txBody>
+          <a:bodyPr/>
+          <a:lstStyle/>
+          <a:p>
+            <a:endParaRPr lang="en-US"/>
+          </a:p>
+        </p:txBody>
       </p:sp>
       <p:sp>
         <p:nvSpPr>
@@ -5214,6 +5080,13 @@
           </a:solidFill>
           <a:ln/>
         </p:spPr>
+        <p:txBody>
+          <a:bodyPr/>
+          <a:lstStyle/>
+          <a:p>
+            <a:endParaRPr lang="en-US"/>
+          </a:p>
+        </p:txBody>
       </p:sp>
       <p:sp>
         <p:nvSpPr>
@@ -5236,7 +5109,7 @@
           <a:bodyPr wrap="square" lIns="0" tIns="0" rIns="0" bIns="0" rtlCol="0" anchor="ctr"/>
           <a:lstStyle/>
           <a:p>
-            <a:pPr indent="0" marL="0">
+            <a:pPr marL="0" indent="0">
               <a:buNone/>
             </a:pPr>
             <a:r>
@@ -5381,7 +5254,7 @@
           <a:bodyPr wrap="square" lIns="0" tIns="0" rIns="0" bIns="0" rtlCol="0" anchor="ctr"/>
           <a:lstStyle/>
           <a:p>
-            <a:pPr indent="0" marL="0">
+            <a:pPr marL="0" indent="0">
               <a:lnSpc>
                 <a:spcPct val="110000"/>
               </a:lnSpc>
@@ -5426,13 +5299,20 @@
             <a:prstDash val="solid"/>
           </a:ln>
           <a:effectLst>
-            <a:outerShdw sx="100000" sy="100000" kx="0" ky="0" algn="bl" rotWithShape="0" blurRad="88900" dist="38100" dir="8100000">
+            <a:outerShdw blurRad="88900" dist="38100" dir="8100000" algn="bl" rotWithShape="0">
               <a:srgbClr val="9AA5B5">
                 <a:alpha val="22000"/>
               </a:srgbClr>
             </a:outerShdw>
           </a:effectLst>
         </p:spPr>
+        <p:txBody>
+          <a:bodyPr/>
+          <a:lstStyle/>
+          <a:p>
+            <a:endParaRPr lang="en-US"/>
+          </a:p>
+        </p:txBody>
       </p:sp>
       <p:sp>
         <p:nvSpPr>
@@ -5453,6 +5333,13 @@
           </a:solidFill>
           <a:ln/>
         </p:spPr>
+        <p:txBody>
+          <a:bodyPr/>
+          <a:lstStyle/>
+          <a:p>
+            <a:endParaRPr lang="en-US"/>
+          </a:p>
+        </p:txBody>
       </p:sp>
       <p:sp>
         <p:nvSpPr>
@@ -5475,7 +5362,7 @@
           <a:bodyPr wrap="square" lIns="0" tIns="0" rIns="0" bIns="0" rtlCol="0" anchor="ctr"/>
           <a:lstStyle/>
           <a:p>
-            <a:pPr indent="0" marL="0">
+            <a:pPr marL="0" indent="0">
               <a:buNone/>
             </a:pPr>
             <a:r>
@@ -5599,7 +5486,7 @@
           <a:bodyPr wrap="square" lIns="0" tIns="0" rIns="0" bIns="0" rtlCol="0" anchor="ctr"/>
           <a:lstStyle/>
           <a:p>
-            <a:pPr indent="0" marL="0">
+            <a:pPr marL="0" indent="0">
               <a:lnSpc>
                 <a:spcPct val="110000"/>
               </a:lnSpc>
@@ -5644,13 +5531,20 @@
             <a:prstDash val="solid"/>
           </a:ln>
           <a:effectLst>
-            <a:outerShdw sx="100000" sy="100000" kx="0" ky="0" algn="bl" rotWithShape="0" blurRad="88900" dist="38100" dir="8100000">
+            <a:outerShdw blurRad="88900" dist="38100" dir="8100000" algn="bl" rotWithShape="0">
               <a:srgbClr val="9AA5B5">
                 <a:alpha val="22000"/>
               </a:srgbClr>
             </a:outerShdw>
           </a:effectLst>
         </p:spPr>
+        <p:txBody>
+          <a:bodyPr/>
+          <a:lstStyle/>
+          <a:p>
+            <a:endParaRPr lang="en-US"/>
+          </a:p>
+        </p:txBody>
       </p:sp>
       <p:sp>
         <p:nvSpPr>
@@ -5671,6 +5565,13 @@
           </a:solidFill>
           <a:ln/>
         </p:spPr>
+        <p:txBody>
+          <a:bodyPr/>
+          <a:lstStyle/>
+          <a:p>
+            <a:endParaRPr lang="en-US"/>
+          </a:p>
+        </p:txBody>
       </p:sp>
       <p:sp>
         <p:nvSpPr>
@@ -5693,7 +5594,7 @@
           <a:bodyPr wrap="square" lIns="0" tIns="0" rIns="0" bIns="0" rtlCol="0" anchor="ctr"/>
           <a:lstStyle/>
           <a:p>
-            <a:pPr indent="0" marL="0">
+            <a:pPr marL="0" indent="0">
               <a:buNone/>
             </a:pPr>
             <a:r>
@@ -5817,7 +5718,7 @@
           <a:bodyPr wrap="square" lIns="0" tIns="0" rIns="0" bIns="0" rtlCol="0" anchor="ctr"/>
           <a:lstStyle/>
           <a:p>
-            <a:pPr indent="0" marL="0">
+            <a:pPr marL="0" indent="0">
               <a:lnSpc>
                 <a:spcPct val="110000"/>
               </a:lnSpc>
@@ -5859,7 +5760,7 @@
           <a:bodyPr wrap="square" lIns="0" tIns="0" rIns="0" bIns="0" rtlCol="0" anchor="ctr"/>
           <a:lstStyle/>
           <a:p>
-            <a:pPr indent="0" marL="0">
+            <a:pPr marL="0" indent="0">
               <a:buNone/>
             </a:pPr>
             <a:r>
@@ -5898,7 +5799,7 @@
           <a:bodyPr wrap="square" lIns="0" tIns="0" rIns="0" bIns="0" rtlCol="0" anchor="ctr"/>
           <a:lstStyle/>
           <a:p>
-            <a:pPr algn="r" indent="0" marL="0">
+            <a:pPr marL="0" indent="0" algn="r">
               <a:buNone/>
             </a:pPr>
             <a:r>
@@ -5962,11 +5863,11 @@
           <a:bodyPr wrap="square" lIns="0" tIns="0" rIns="0" bIns="0" rtlCol="0" anchor="ctr"/>
           <a:lstStyle/>
           <a:p>
-            <a:pPr indent="0" marL="0">
+            <a:pPr marL="0" indent="0">
               <a:buNone/>
             </a:pPr>
             <a:r>
-              <a:rPr lang="en-US" sz="1200" b="1" spc="300" kern="0" dirty="0">
+              <a:rPr lang="en-US" sz="1200" b="1" kern="0" spc="300" dirty="0">
                 <a:solidFill>
                   <a:srgbClr val="4C6FA5"/>
                 </a:solidFill>
@@ -6001,7 +5902,7 @@
           <a:bodyPr wrap="square" lIns="0" tIns="0" rIns="0" bIns="0" rtlCol="0" anchor="ctr"/>
           <a:lstStyle/>
           <a:p>
-            <a:pPr indent="0" marL="0">
+            <a:pPr marL="0" indent="0">
               <a:buNone/>
             </a:pPr>
             <a:r>
@@ -6043,13 +5944,20 @@
             <a:prstDash val="solid"/>
           </a:ln>
           <a:effectLst>
-            <a:outerShdw sx="100000" sy="100000" kx="0" ky="0" algn="bl" rotWithShape="0" blurRad="88900" dist="38100" dir="8100000">
+            <a:outerShdw blurRad="88900" dist="38100" dir="8100000" algn="bl" rotWithShape="0">
               <a:srgbClr val="9AA5B5">
                 <a:alpha val="22000"/>
               </a:srgbClr>
             </a:outerShdw>
           </a:effectLst>
         </p:spPr>
+        <p:txBody>
+          <a:bodyPr/>
+          <a:lstStyle/>
+          <a:p>
+            <a:endParaRPr lang="en-US"/>
+          </a:p>
+        </p:txBody>
       </p:sp>
       <p:sp>
         <p:nvSpPr>
@@ -6075,13 +5983,20 @@
             <a:prstDash val="solid"/>
           </a:ln>
           <a:effectLst>
-            <a:outerShdw sx="100000" sy="100000" kx="0" ky="0" algn="bl" rotWithShape="0" blurRad="88900" dist="38100" dir="8100000">
+            <a:outerShdw blurRad="88900" dist="38100" dir="8100000" algn="bl" rotWithShape="0">
               <a:srgbClr val="9AA5B5">
                 <a:alpha val="22000"/>
               </a:srgbClr>
             </a:outerShdw>
           </a:effectLst>
         </p:spPr>
+        <p:txBody>
+          <a:bodyPr/>
+          <a:lstStyle/>
+          <a:p>
+            <a:endParaRPr lang="en-US"/>
+          </a:p>
+        </p:txBody>
       </p:sp>
       <p:sp>
         <p:nvSpPr>
@@ -6104,7 +6019,7 @@
           <a:bodyPr wrap="square" lIns="0" tIns="0" rIns="0" bIns="0" rtlCol="0" anchor="ctr"/>
           <a:lstStyle/>
           <a:p>
-            <a:pPr indent="0" marL="0">
+            <a:pPr marL="0" indent="0">
               <a:buNone/>
             </a:pPr>
             <a:r>
@@ -6143,7 +6058,7 @@
           <a:bodyPr wrap="square" lIns="0" tIns="0" rIns="0" bIns="0" rtlCol="0" anchor="ctr"/>
           <a:lstStyle/>
           <a:p>
-            <a:pPr indent="0" marL="0">
+            <a:pPr marL="0" indent="0">
               <a:buNone/>
             </a:pPr>
             <a:r>
@@ -6288,7 +6203,7 @@
           <a:bodyPr wrap="square" lIns="0" tIns="0" rIns="0" bIns="0" rtlCol="0" anchor="ctr"/>
           <a:lstStyle/>
           <a:p>
-            <a:pPr indent="0" marL="0">
+            <a:pPr marL="0" indent="0">
               <a:buNone/>
             </a:pPr>
             <a:r>
@@ -6327,7 +6242,7 @@
           <a:bodyPr wrap="square" lIns="0" tIns="0" rIns="0" bIns="0" rtlCol="0" anchor="ctr"/>
           <a:lstStyle/>
           <a:p>
-            <a:pPr indent="0" marL="0">
+            <a:pPr marL="0" indent="0">
               <a:buNone/>
             </a:pPr>
             <a:r>
@@ -6472,7 +6387,7 @@
           <a:bodyPr wrap="square" lIns="0" tIns="0" rIns="0" bIns="0" rtlCol="0" anchor="ctr"/>
           <a:lstStyle/>
           <a:p>
-            <a:pPr indent="0" marL="0">
+            <a:pPr marL="0" indent="0">
               <a:buNone/>
             </a:pPr>
             <a:r>
@@ -6511,7 +6426,7 @@
           <a:bodyPr wrap="square" lIns="0" tIns="0" rIns="0" bIns="0" rtlCol="0" anchor="ctr"/>
           <a:lstStyle/>
           <a:p>
-            <a:pPr algn="r" indent="0" marL="0">
+            <a:pPr marL="0" indent="0" algn="r">
               <a:buNone/>
             </a:pPr>
             <a:r>
@@ -6575,11 +6490,11 @@
           <a:bodyPr wrap="square" lIns="0" tIns="0" rIns="0" bIns="0" rtlCol="0" anchor="ctr"/>
           <a:lstStyle/>
           <a:p>
-            <a:pPr indent="0" marL="0">
+            <a:pPr marL="0" indent="0">
               <a:buNone/>
             </a:pPr>
             <a:r>
-              <a:rPr lang="en-US" sz="1200" b="1" spc="300" kern="0" dirty="0">
+              <a:rPr lang="en-US" sz="1200" b="1" kern="0" spc="300" dirty="0">
                 <a:solidFill>
                   <a:srgbClr val="4C6FA5"/>
                 </a:solidFill>
@@ -6614,7 +6529,7 @@
           <a:bodyPr wrap="square" lIns="0" tIns="0" rIns="0" bIns="0" rtlCol="0" anchor="ctr"/>
           <a:lstStyle/>
           <a:p>
-            <a:pPr indent="0" marL="0">
+            <a:pPr marL="0" indent="0">
               <a:buNone/>
             </a:pPr>
             <a:r>
@@ -6634,7 +6549,7 @@
       </p:sp>
       <p:graphicFrame>
         <p:nvGraphicFramePr>
-          <p:cNvPr id="4" name="Chart 0" descr=""/>
+          <p:cNvPr id="4" name="Chart 0"/>
           <p:cNvGraphicFramePr/>
           <p:nvPr/>
         </p:nvGraphicFramePr>
@@ -6642,9 +6557,9 @@
           <a:off x="640080" y="1737360"/>
           <a:ext cx="5486400" cy="3840480"/>
         </p:xfrm>
-        <a:graphic xmlns:a="http://schemas.openxmlformats.org/drawingml/2006/main">
+        <a:graphic>
           <a:graphicData uri="http://schemas.openxmlformats.org/drawingml/2006/chart">
-            <c:chart xmlns:c="http://schemas.openxmlformats.org/drawingml/2006/chart" r:id="rId1"/>
+            <c:chart xmlns:c="http://schemas.openxmlformats.org/drawingml/2006/chart" xmlns:r="http://schemas.openxmlformats.org/officeDocument/2006/relationships" r:id="rId3"/>
           </a:graphicData>
         </a:graphic>
       </p:graphicFrame>
@@ -6669,7 +6584,7 @@
           <a:bodyPr wrap="square" lIns="0" tIns="0" rIns="0" bIns="0" rtlCol="0" anchor="ctr"/>
           <a:lstStyle/>
           <a:p>
-            <a:pPr indent="0" marL="0">
+            <a:pPr marL="0" indent="0">
               <a:buNone/>
             </a:pPr>
             <a:r>
@@ -6826,7 +6741,7 @@
           <a:bodyPr wrap="square" lIns="0" tIns="0" rIns="0" bIns="0" rtlCol="0" anchor="ctr"/>
           <a:lstStyle/>
           <a:p>
-            <a:pPr indent="0" marL="0">
+            <a:pPr marL="0" indent="0">
               <a:buNone/>
             </a:pPr>
             <a:r>
@@ -6865,7 +6780,7 @@
           <a:bodyPr wrap="square" lIns="0" tIns="0" rIns="0" bIns="0" rtlCol="0" anchor="ctr"/>
           <a:lstStyle/>
           <a:p>
-            <a:pPr algn="r" indent="0" marL="0">
+            <a:pPr marL="0" indent="0" algn="r">
               <a:buNone/>
             </a:pPr>
             <a:r>
@@ -6929,11 +6844,11 @@
           <a:bodyPr wrap="square" lIns="0" tIns="0" rIns="0" bIns="0" rtlCol="0" anchor="ctr"/>
           <a:lstStyle/>
           <a:p>
-            <a:pPr indent="0" marL="0">
+            <a:pPr marL="0" indent="0">
               <a:buNone/>
             </a:pPr>
             <a:r>
-              <a:rPr lang="en-US" sz="1200" b="1" spc="300" kern="0" dirty="0">
+              <a:rPr lang="en-US" sz="1200" b="1" kern="0" spc="300" dirty="0">
                 <a:solidFill>
                   <a:srgbClr val="4C6FA5"/>
                 </a:solidFill>
@@ -6968,7 +6883,7 @@
           <a:bodyPr wrap="square" lIns="0" tIns="0" rIns="0" bIns="0" rtlCol="0" anchor="ctr"/>
           <a:lstStyle/>
           <a:p>
-            <a:pPr indent="0" marL="0">
+            <a:pPr marL="0" indent="0">
               <a:buNone/>
             </a:pPr>
             <a:r>
@@ -6995,24 +6910,48 @@
           <p:nvPr>
             <p:extLst>
               <p:ext uri="{D42A27DB-BD31-4B8C-83A1-F6EECF244321}">
-                <p14:modId xmlns:p14="http://schemas.microsoft.com/office/powerpoint/2010/main" val="1579011935"/>
+                <p14:modId xmlns:p14="http://schemas.microsoft.com/office/powerpoint/2010/main" val="3759045806"/>
               </p:ext>
             </p:extLst>
           </p:nvPr>
         </p:nvGraphicFramePr>
         <p:xfrm>
           <a:off x="640080" y="1691640"/>
-          <a:ext cx="6126480" cy="914400"/>
+          <a:ext cx="6126480" cy="3072384"/>
         </p:xfrm>
         <a:graphic>
           <a:graphicData uri="http://schemas.openxmlformats.org/drawingml/2006/table">
             <a:tbl>
               <a:tblPr/>
               <a:tblGrid>
-                <a:gridCol w="502920"/>
-                <a:gridCol w="2743200"/>
-                <a:gridCol w="1417320"/>
-                <a:gridCol w="1463040"/>
+                <a:gridCol w="502920">
+                  <a:extLst>
+                    <a:ext uri="{9D8B030D-6E8A-4147-A177-3AD203B41FA5}">
+                      <a16:colId xmlns:a16="http://schemas.microsoft.com/office/drawing/2014/main" val="20000"/>
+                    </a:ext>
+                  </a:extLst>
+                </a:gridCol>
+                <a:gridCol w="2743200">
+                  <a:extLst>
+                    <a:ext uri="{9D8B030D-6E8A-4147-A177-3AD203B41FA5}">
+                      <a16:colId xmlns:a16="http://schemas.microsoft.com/office/drawing/2014/main" val="20001"/>
+                    </a:ext>
+                  </a:extLst>
+                </a:gridCol>
+                <a:gridCol w="1417320">
+                  <a:extLst>
+                    <a:ext uri="{9D8B030D-6E8A-4147-A177-3AD203B41FA5}">
+                      <a16:colId xmlns:a16="http://schemas.microsoft.com/office/drawing/2014/main" val="20002"/>
+                    </a:ext>
+                  </a:extLst>
+                </a:gridCol>
+                <a:gridCol w="1463040">
+                  <a:extLst>
+                    <a:ext uri="{9D8B030D-6E8A-4147-A177-3AD203B41FA5}">
+                      <a16:colId xmlns:a16="http://schemas.microsoft.com/office/drawing/2014/main" val="20003"/>
+                    </a:ext>
+                  </a:extLst>
+                </a:gridCol>
               </a:tblGrid>
               <a:tr h="438912">
                 <a:tc>
@@ -7020,7 +6959,7 @@
                     <a:bodyPr/>
                     <a:lstStyle/>
                     <a:p>
-                      <a:pPr algn="ctr" indent="0" marL="0">
+                      <a:pPr marL="0" indent="0" algn="ctr">
                         <a:buNone/>
                       </a:pPr>
                       <a:r>
@@ -7041,7 +6980,7 @@
                       </a:endParaRPr>
                     </a:p>
                   </a:txBody>
-                  <a:tcPr marL="91440" marR="91440" marT="45720" marB="45720" anchor="ctr">
+                  <a:tcPr anchor="ctr">
                     <a:lnL w="6350" cap="flat" cmpd="sng" algn="ctr">
                       <a:solidFill>
                         <a:srgbClr val="D8DEE9"/>
@@ -7088,7 +7027,7 @@
                     <a:bodyPr/>
                     <a:lstStyle/>
                     <a:p>
-                      <a:pPr algn="l" indent="0" marL="0">
+                      <a:pPr marL="0" indent="0" algn="l">
                         <a:buNone/>
                       </a:pPr>
                       <a:r>
@@ -7109,7 +7048,7 @@
                       </a:endParaRPr>
                     </a:p>
                   </a:txBody>
-                  <a:tcPr marL="91440" marR="91440" marT="45720" marB="45720" anchor="ctr">
+                  <a:tcPr anchor="ctr">
                     <a:lnL w="6350" cap="flat" cmpd="sng" algn="ctr">
                       <a:solidFill>
                         <a:srgbClr val="D8DEE9"/>
@@ -7156,7 +7095,7 @@
                     <a:bodyPr/>
                     <a:lstStyle/>
                     <a:p>
-                      <a:pPr algn="l" indent="0" marL="0">
+                      <a:pPr marL="0" indent="0" algn="l">
                         <a:buNone/>
                       </a:pPr>
                       <a:r>
@@ -7177,7 +7116,7 @@
                       </a:endParaRPr>
                     </a:p>
                   </a:txBody>
-                  <a:tcPr marL="91440" marR="91440" marT="45720" marB="45720" anchor="ctr">
+                  <a:tcPr anchor="ctr">
                     <a:lnL w="6350" cap="flat" cmpd="sng" algn="ctr">
                       <a:solidFill>
                         <a:srgbClr val="D8DEE9"/>
@@ -7224,7 +7163,7 @@
                     <a:bodyPr/>
                     <a:lstStyle/>
                     <a:p>
-                      <a:pPr algn="ctr" indent="0" marL="0">
+                      <a:pPr marL="0" indent="0" algn="ctr">
                         <a:buNone/>
                       </a:pPr>
                       <a:r>
@@ -7245,7 +7184,7 @@
                       </a:endParaRPr>
                     </a:p>
                   </a:txBody>
-                  <a:tcPr marL="91440" marR="91440" marT="45720" marB="45720" anchor="ctr">
+                  <a:tcPr anchor="ctr">
                     <a:lnL w="6350" cap="flat" cmpd="sng" algn="ctr">
                       <a:solidFill>
                         <a:srgbClr val="D8DEE9"/>
@@ -7287,6 +7226,11 @@
                     </a:solidFill>
                   </a:tcPr>
                 </a:tc>
+                <a:extLst>
+                  <a:ext uri="{0D108BD9-81ED-4DB2-BD59-A6C34878D82A}">
+                    <a16:rowId xmlns:a16="http://schemas.microsoft.com/office/drawing/2014/main" val="10000"/>
+                  </a:ext>
+                </a:extLst>
               </a:tr>
               <a:tr h="438912">
                 <a:tc>
@@ -7294,7 +7238,7 @@
                     <a:bodyPr/>
                     <a:lstStyle/>
                     <a:p>
-                      <a:pPr algn="ctr" indent="0" marL="0">
+                      <a:pPr marL="0" indent="0" algn="ctr">
                         <a:buNone/>
                       </a:pPr>
                       <a:r>
@@ -7315,7 +7259,7 @@
                       </a:endParaRPr>
                     </a:p>
                   </a:txBody>
-                  <a:tcPr marL="91440" marR="91440" marT="45720" marB="45720" anchor="ctr">
+                  <a:tcPr anchor="ctr">
                     <a:lnL w="6350" cap="flat" cmpd="sng" algn="ctr">
                       <a:solidFill>
                         <a:srgbClr val="D8DEE9"/>
@@ -7362,7 +7306,7 @@
                     <a:bodyPr/>
                     <a:lstStyle/>
                     <a:p>
-                      <a:pPr algn="l" indent="0" marL="0">
+                      <a:pPr marL="0" indent="0" algn="l">
                         <a:buNone/>
                       </a:pPr>
                       <a:r>
@@ -7383,7 +7327,7 @@
                       </a:endParaRPr>
                     </a:p>
                   </a:txBody>
-                  <a:tcPr marL="91440" marR="91440" marT="45720" marB="45720" anchor="ctr">
+                  <a:tcPr anchor="ctr">
                     <a:lnL w="6350" cap="flat" cmpd="sng" algn="ctr">
                       <a:solidFill>
                         <a:srgbClr val="D8DEE9"/>
@@ -7430,7 +7374,7 @@
                     <a:bodyPr/>
                     <a:lstStyle/>
                     <a:p>
-                      <a:pPr algn="l" indent="0" marL="0">
+                      <a:pPr marL="0" indent="0" algn="l">
                         <a:buNone/>
                       </a:pPr>
                       <a:r>
@@ -7451,7 +7395,7 @@
                       </a:endParaRPr>
                     </a:p>
                   </a:txBody>
-                  <a:tcPr marL="91440" marR="91440" marT="45720" marB="45720" anchor="ctr">
+                  <a:tcPr anchor="ctr">
                     <a:lnL w="6350" cap="flat" cmpd="sng" algn="ctr">
                       <a:solidFill>
                         <a:srgbClr val="D8DEE9"/>
@@ -7498,7 +7442,7 @@
                     <a:bodyPr/>
                     <a:lstStyle/>
                     <a:p>
-                      <a:pPr algn="ctr" indent="0" marL="0">
+                      <a:pPr marL="0" indent="0" algn="ctr">
                         <a:buNone/>
                       </a:pPr>
                       <a:r>
@@ -7510,7 +7454,7 @@
                           <a:ea typeface="Calibri" pitchFamily="34" charset="-122"/>
                           <a:cs typeface="Calibri" pitchFamily="34" charset="-120"/>
                         </a:rPr>
-                        <a:t>__ / 8</a:t>
+                        <a:t>0/ 8</a:t>
                       </a:r>
                       <a:endParaRPr lang="en-US" sz="1250" dirty="0">
                         <a:latin typeface="Calibri" charset="0"/>
@@ -7519,7 +7463,7 @@
                       </a:endParaRPr>
                     </a:p>
                   </a:txBody>
-                  <a:tcPr marL="91440" marR="91440" marT="45720" marB="45720" anchor="ctr">
+                  <a:tcPr anchor="ctr">
                     <a:lnL w="6350" cap="flat" cmpd="sng" algn="ctr">
                       <a:solidFill>
                         <a:srgbClr val="D8DEE9"/>
@@ -7561,6 +7505,11 @@
                     </a:solidFill>
                   </a:tcPr>
                 </a:tc>
+                <a:extLst>
+                  <a:ext uri="{0D108BD9-81ED-4DB2-BD59-A6C34878D82A}">
+                    <a16:rowId xmlns:a16="http://schemas.microsoft.com/office/drawing/2014/main" val="10001"/>
+                  </a:ext>
+                </a:extLst>
               </a:tr>
               <a:tr h="438912">
                 <a:tc>
@@ -7568,7 +7517,7 @@
                     <a:bodyPr/>
                     <a:lstStyle/>
                     <a:p>
-                      <a:pPr algn="ctr" indent="0" marL="0">
+                      <a:pPr marL="0" indent="0" algn="ctr">
                         <a:buNone/>
                       </a:pPr>
                       <a:r>
@@ -7589,7 +7538,7 @@
                       </a:endParaRPr>
                     </a:p>
                   </a:txBody>
-                  <a:tcPr marL="91440" marR="91440" marT="45720" marB="45720" anchor="ctr">
+                  <a:tcPr anchor="ctr">
                     <a:lnL w="6350" cap="flat" cmpd="sng" algn="ctr">
                       <a:solidFill>
                         <a:srgbClr val="D8DEE9"/>
@@ -7636,7 +7585,7 @@
                     <a:bodyPr/>
                     <a:lstStyle/>
                     <a:p>
-                      <a:pPr algn="l" indent="0" marL="0">
+                      <a:pPr marL="0" indent="0" algn="l">
                         <a:buNone/>
                       </a:pPr>
                       <a:r>
@@ -7657,7 +7606,7 @@
                       </a:endParaRPr>
                     </a:p>
                   </a:txBody>
-                  <a:tcPr marL="91440" marR="91440" marT="45720" marB="45720" anchor="ctr">
+                  <a:tcPr anchor="ctr">
                     <a:lnL w="6350" cap="flat" cmpd="sng" algn="ctr">
                       <a:solidFill>
                         <a:srgbClr val="D8DEE9"/>
@@ -7704,7 +7653,7 @@
                     <a:bodyPr/>
                     <a:lstStyle/>
                     <a:p>
-                      <a:pPr algn="l" indent="0" marL="0">
+                      <a:pPr marL="0" indent="0" algn="l">
                         <a:buNone/>
                       </a:pPr>
                       <a:r>
@@ -7725,7 +7674,7 @@
                       </a:endParaRPr>
                     </a:p>
                   </a:txBody>
-                  <a:tcPr marL="91440" marR="91440" marT="45720" marB="45720" anchor="ctr">
+                  <a:tcPr anchor="ctr">
                     <a:lnL w="6350" cap="flat" cmpd="sng" algn="ctr">
                       <a:solidFill>
                         <a:srgbClr val="D8DEE9"/>
@@ -7772,7 +7721,7 @@
                     <a:bodyPr/>
                     <a:lstStyle/>
                     <a:p>
-                      <a:pPr algn="ctr" indent="0" marL="0">
+                      <a:pPr marL="0" indent="0" algn="ctr">
                         <a:buNone/>
                       </a:pPr>
                       <a:r>
@@ -7784,7 +7733,7 @@
                           <a:ea typeface="Calibri" pitchFamily="34" charset="-122"/>
                           <a:cs typeface="Calibri" pitchFamily="34" charset="-120"/>
                         </a:rPr>
-                        <a:t>__ / 8</a:t>
+                        <a:t>0 / 8</a:t>
                       </a:r>
                       <a:endParaRPr lang="en-US" sz="1250" dirty="0">
                         <a:latin typeface="Calibri" charset="0"/>
@@ -7793,7 +7742,7 @@
                       </a:endParaRPr>
                     </a:p>
                   </a:txBody>
-                  <a:tcPr marL="91440" marR="91440" marT="45720" marB="45720" anchor="ctr">
+                  <a:tcPr anchor="ctr">
                     <a:lnL w="6350" cap="flat" cmpd="sng" algn="ctr">
                       <a:solidFill>
                         <a:srgbClr val="D8DEE9"/>
@@ -7835,6 +7784,11 @@
                     </a:solidFill>
                   </a:tcPr>
                 </a:tc>
+                <a:extLst>
+                  <a:ext uri="{0D108BD9-81ED-4DB2-BD59-A6C34878D82A}">
+                    <a16:rowId xmlns:a16="http://schemas.microsoft.com/office/drawing/2014/main" val="10002"/>
+                  </a:ext>
+                </a:extLst>
               </a:tr>
               <a:tr h="438912">
                 <a:tc>
@@ -7842,7 +7796,7 @@
                     <a:bodyPr/>
                     <a:lstStyle/>
                     <a:p>
-                      <a:pPr algn="ctr" indent="0" marL="0">
+                      <a:pPr marL="0" indent="0" algn="ctr">
                         <a:buNone/>
                       </a:pPr>
                       <a:r>
@@ -7863,7 +7817,7 @@
                       </a:endParaRPr>
                     </a:p>
                   </a:txBody>
-                  <a:tcPr marL="91440" marR="91440" marT="45720" marB="45720" anchor="ctr">
+                  <a:tcPr anchor="ctr">
                     <a:lnL w="6350" cap="flat" cmpd="sng" algn="ctr">
                       <a:solidFill>
                         <a:srgbClr val="D8DEE9"/>
@@ -7910,7 +7864,7 @@
                     <a:bodyPr/>
                     <a:lstStyle/>
                     <a:p>
-                      <a:pPr algn="l" indent="0" marL="0">
+                      <a:pPr marL="0" indent="0" algn="l">
                         <a:buNone/>
                       </a:pPr>
                       <a:r>
@@ -7931,7 +7885,7 @@
                       </a:endParaRPr>
                     </a:p>
                   </a:txBody>
-                  <a:tcPr marL="91440" marR="91440" marT="45720" marB="45720" anchor="ctr">
+                  <a:tcPr anchor="ctr">
                     <a:lnL w="6350" cap="flat" cmpd="sng" algn="ctr">
                       <a:solidFill>
                         <a:srgbClr val="D8DEE9"/>
@@ -7978,7 +7932,7 @@
                     <a:bodyPr/>
                     <a:lstStyle/>
                     <a:p>
-                      <a:pPr algn="l" indent="0" marL="0">
+                      <a:pPr marL="0" indent="0" algn="l">
                         <a:buNone/>
                       </a:pPr>
                       <a:r>
@@ -7999,7 +7953,7 @@
                       </a:endParaRPr>
                     </a:p>
                   </a:txBody>
-                  <a:tcPr marL="91440" marR="91440" marT="45720" marB="45720" anchor="ctr">
+                  <a:tcPr anchor="ctr">
                     <a:lnL w="6350" cap="flat" cmpd="sng" algn="ctr">
                       <a:solidFill>
                         <a:srgbClr val="D8DEE9"/>
@@ -8046,7 +8000,7 @@
                     <a:bodyPr/>
                     <a:lstStyle/>
                     <a:p>
-                      <a:pPr algn="ctr" indent="0" marL="0">
+                      <a:pPr marL="0" indent="0" algn="ctr">
                         <a:buNone/>
                       </a:pPr>
                       <a:r>
@@ -8058,7 +8012,7 @@
                           <a:ea typeface="Calibri" pitchFamily="34" charset="-122"/>
                           <a:cs typeface="Calibri" pitchFamily="34" charset="-120"/>
                         </a:rPr>
-                        <a:t>__ / 8</a:t>
+                        <a:t>0 / 8</a:t>
                       </a:r>
                       <a:endParaRPr lang="en-US" sz="1250" dirty="0">
                         <a:latin typeface="Calibri" charset="0"/>
@@ -8067,7 +8021,7 @@
                       </a:endParaRPr>
                     </a:p>
                   </a:txBody>
-                  <a:tcPr marL="91440" marR="91440" marT="45720" marB="45720" anchor="ctr">
+                  <a:tcPr anchor="ctr">
                     <a:lnL w="6350" cap="flat" cmpd="sng" algn="ctr">
                       <a:solidFill>
                         <a:srgbClr val="D8DEE9"/>
@@ -8109,6 +8063,11 @@
                     </a:solidFill>
                   </a:tcPr>
                 </a:tc>
+                <a:extLst>
+                  <a:ext uri="{0D108BD9-81ED-4DB2-BD59-A6C34878D82A}">
+                    <a16:rowId xmlns:a16="http://schemas.microsoft.com/office/drawing/2014/main" val="10003"/>
+                  </a:ext>
+                </a:extLst>
               </a:tr>
               <a:tr h="438912">
                 <a:tc>
@@ -8116,7 +8075,7 @@
                     <a:bodyPr/>
                     <a:lstStyle/>
                     <a:p>
-                      <a:pPr algn="ctr" indent="0" marL="0">
+                      <a:pPr marL="0" indent="0" algn="ctr">
                         <a:buNone/>
                       </a:pPr>
                       <a:r>
@@ -8137,7 +8096,7 @@
                       </a:endParaRPr>
                     </a:p>
                   </a:txBody>
-                  <a:tcPr marL="91440" marR="91440" marT="45720" marB="45720" anchor="ctr">
+                  <a:tcPr anchor="ctr">
                     <a:lnL w="6350" cap="flat" cmpd="sng" algn="ctr">
                       <a:solidFill>
                         <a:srgbClr val="D8DEE9"/>
@@ -8184,7 +8143,7 @@
                     <a:bodyPr/>
                     <a:lstStyle/>
                     <a:p>
-                      <a:pPr algn="l" indent="0" marL="0">
+                      <a:pPr marL="0" indent="0" algn="l">
                         <a:buNone/>
                       </a:pPr>
                       <a:r>
@@ -8205,7 +8164,7 @@
                       </a:endParaRPr>
                     </a:p>
                   </a:txBody>
-                  <a:tcPr marL="91440" marR="91440" marT="45720" marB="45720" anchor="ctr">
+                  <a:tcPr anchor="ctr">
                     <a:lnL w="6350" cap="flat" cmpd="sng" algn="ctr">
                       <a:solidFill>
                         <a:srgbClr val="D8DEE9"/>
@@ -8252,7 +8211,7 @@
                     <a:bodyPr/>
                     <a:lstStyle/>
                     <a:p>
-                      <a:pPr algn="l" indent="0" marL="0">
+                      <a:pPr marL="0" indent="0" algn="l">
                         <a:buNone/>
                       </a:pPr>
                       <a:r>
@@ -8273,7 +8232,7 @@
                       </a:endParaRPr>
                     </a:p>
                   </a:txBody>
-                  <a:tcPr marL="91440" marR="91440" marT="45720" marB="45720" anchor="ctr">
+                  <a:tcPr anchor="ctr">
                     <a:lnL w="6350" cap="flat" cmpd="sng" algn="ctr">
                       <a:solidFill>
                         <a:srgbClr val="D8DEE9"/>
@@ -8320,7 +8279,7 @@
                     <a:bodyPr/>
                     <a:lstStyle/>
                     <a:p>
-                      <a:pPr algn="ctr" indent="0" marL="0">
+                      <a:pPr marL="0" indent="0" algn="ctr">
                         <a:buNone/>
                       </a:pPr>
                       <a:r>
@@ -8332,7 +8291,7 @@
                           <a:ea typeface="Calibri" pitchFamily="34" charset="-122"/>
                           <a:cs typeface="Calibri" pitchFamily="34" charset="-120"/>
                         </a:rPr>
-                        <a:t>__ / 8</a:t>
+                        <a:t>1 / 8</a:t>
                       </a:r>
                       <a:endParaRPr lang="en-US" sz="1250" dirty="0">
                         <a:latin typeface="Calibri" charset="0"/>
@@ -8341,7 +8300,7 @@
                       </a:endParaRPr>
                     </a:p>
                   </a:txBody>
-                  <a:tcPr marL="91440" marR="91440" marT="45720" marB="45720" anchor="ctr">
+                  <a:tcPr anchor="ctr">
                     <a:lnL w="6350" cap="flat" cmpd="sng" algn="ctr">
                       <a:solidFill>
                         <a:srgbClr val="D8DEE9"/>
@@ -8383,6 +8342,11 @@
                     </a:solidFill>
                   </a:tcPr>
                 </a:tc>
+                <a:extLst>
+                  <a:ext uri="{0D108BD9-81ED-4DB2-BD59-A6C34878D82A}">
+                    <a16:rowId xmlns:a16="http://schemas.microsoft.com/office/drawing/2014/main" val="10004"/>
+                  </a:ext>
+                </a:extLst>
               </a:tr>
               <a:tr h="438912">
                 <a:tc>
@@ -8390,7 +8354,7 @@
                     <a:bodyPr/>
                     <a:lstStyle/>
                     <a:p>
-                      <a:pPr algn="ctr" indent="0" marL="0">
+                      <a:pPr marL="0" indent="0" algn="ctr">
                         <a:buNone/>
                       </a:pPr>
                       <a:r>
@@ -8411,7 +8375,7 @@
                       </a:endParaRPr>
                     </a:p>
                   </a:txBody>
-                  <a:tcPr marL="91440" marR="91440" marT="45720" marB="45720" anchor="ctr">
+                  <a:tcPr anchor="ctr">
                     <a:lnL w="6350" cap="flat" cmpd="sng" algn="ctr">
                       <a:solidFill>
                         <a:srgbClr val="D8DEE9"/>
@@ -8458,7 +8422,7 @@
                     <a:bodyPr/>
                     <a:lstStyle/>
                     <a:p>
-                      <a:pPr algn="l" indent="0" marL="0">
+                      <a:pPr marL="0" indent="0" algn="l">
                         <a:buNone/>
                       </a:pPr>
                       <a:r>
@@ -8479,7 +8443,7 @@
                       </a:endParaRPr>
                     </a:p>
                   </a:txBody>
-                  <a:tcPr marL="91440" marR="91440" marT="45720" marB="45720" anchor="ctr">
+                  <a:tcPr anchor="ctr">
                     <a:lnL w="6350" cap="flat" cmpd="sng" algn="ctr">
                       <a:solidFill>
                         <a:srgbClr val="D8DEE9"/>
@@ -8526,7 +8490,7 @@
                     <a:bodyPr/>
                     <a:lstStyle/>
                     <a:p>
-                      <a:pPr algn="l" indent="0" marL="0">
+                      <a:pPr marL="0" indent="0" algn="l">
                         <a:buNone/>
                       </a:pPr>
                       <a:r>
@@ -8547,7 +8511,7 @@
                       </a:endParaRPr>
                     </a:p>
                   </a:txBody>
-                  <a:tcPr marL="91440" marR="91440" marT="45720" marB="45720" anchor="ctr">
+                  <a:tcPr anchor="ctr">
                     <a:lnL w="6350" cap="flat" cmpd="sng" algn="ctr">
                       <a:solidFill>
                         <a:srgbClr val="D8DEE9"/>
@@ -8594,7 +8558,7 @@
                     <a:bodyPr/>
                     <a:lstStyle/>
                     <a:p>
-                      <a:pPr algn="ctr" indent="0" marL="0">
+                      <a:pPr marL="0" indent="0" algn="ctr">
                         <a:buNone/>
                       </a:pPr>
                       <a:r>
@@ -8606,7 +8570,7 @@
                           <a:ea typeface="Calibri" pitchFamily="34" charset="-122"/>
                           <a:cs typeface="Calibri" pitchFamily="34" charset="-120"/>
                         </a:rPr>
-                        <a:t>__ / 8</a:t>
+                        <a:t>1 / 8</a:t>
                       </a:r>
                       <a:endParaRPr lang="en-US" sz="1250" dirty="0">
                         <a:latin typeface="Calibri" charset="0"/>
@@ -8615,7 +8579,7 @@
                       </a:endParaRPr>
                     </a:p>
                   </a:txBody>
-                  <a:tcPr marL="91440" marR="91440" marT="45720" marB="45720" anchor="ctr">
+                  <a:tcPr anchor="ctr">
                     <a:lnL w="6350" cap="flat" cmpd="sng" algn="ctr">
                       <a:solidFill>
                         <a:srgbClr val="D8DEE9"/>
@@ -8657,6 +8621,11 @@
                     </a:solidFill>
                   </a:tcPr>
                 </a:tc>
+                <a:extLst>
+                  <a:ext uri="{0D108BD9-81ED-4DB2-BD59-A6C34878D82A}">
+                    <a16:rowId xmlns:a16="http://schemas.microsoft.com/office/drawing/2014/main" val="10005"/>
+                  </a:ext>
+                </a:extLst>
               </a:tr>
               <a:tr h="438912">
                 <a:tc>
@@ -8664,7 +8633,7 @@
                     <a:bodyPr/>
                     <a:lstStyle/>
                     <a:p>
-                      <a:pPr algn="ctr" indent="0" marL="0">
+                      <a:pPr marL="0" indent="0" algn="ctr">
                         <a:buNone/>
                       </a:pPr>
                       <a:r>
@@ -8685,7 +8654,7 @@
                       </a:endParaRPr>
                     </a:p>
                   </a:txBody>
-                  <a:tcPr marL="91440" marR="91440" marT="45720" marB="45720" anchor="ctr">
+                  <a:tcPr anchor="ctr">
                     <a:lnL w="6350" cap="flat" cmpd="sng" algn="ctr">
                       <a:solidFill>
                         <a:srgbClr val="D8DEE9"/>
@@ -8732,7 +8701,7 @@
                     <a:bodyPr/>
                     <a:lstStyle/>
                     <a:p>
-                      <a:pPr algn="l" indent="0" marL="0">
+                      <a:pPr marL="0" indent="0" algn="l">
                         <a:buNone/>
                       </a:pPr>
                       <a:r>
@@ -8753,7 +8722,7 @@
                       </a:endParaRPr>
                     </a:p>
                   </a:txBody>
-                  <a:tcPr marL="91440" marR="91440" marT="45720" marB="45720" anchor="ctr">
+                  <a:tcPr anchor="ctr">
                     <a:lnL w="6350" cap="flat" cmpd="sng" algn="ctr">
                       <a:solidFill>
                         <a:srgbClr val="D8DEE9"/>
@@ -8800,7 +8769,7 @@
                     <a:bodyPr/>
                     <a:lstStyle/>
                     <a:p>
-                      <a:pPr algn="l" indent="0" marL="0">
+                      <a:pPr marL="0" indent="0" algn="l">
                         <a:buNone/>
                       </a:pPr>
                       <a:r>
@@ -8821,7 +8790,7 @@
                       </a:endParaRPr>
                     </a:p>
                   </a:txBody>
-                  <a:tcPr marL="91440" marR="91440" marT="45720" marB="45720" anchor="ctr">
+                  <a:tcPr anchor="ctr">
                     <a:lnL w="6350" cap="flat" cmpd="sng" algn="ctr">
                       <a:solidFill>
                         <a:srgbClr val="D8DEE9"/>
@@ -8868,9 +8837,20 @@
                     <a:bodyPr/>
                     <a:lstStyle/>
                     <a:p>
-                      <a:pPr algn="ctr" indent="0" marL="0">
+                      <a:pPr marL="0" indent="0" algn="ctr">
                         <a:buNone/>
                       </a:pPr>
+                      <a:r>
+                        <a:rPr lang="en-US" sz="1250" b="1" i="1">
+                          <a:solidFill>
+                            <a:srgbClr val="1F2933"/>
+                          </a:solidFill>
+                          <a:latin typeface="Calibri" pitchFamily="34" charset="0"/>
+                          <a:ea typeface="Calibri" pitchFamily="34" charset="-122"/>
+                          <a:cs typeface="Calibri" pitchFamily="34" charset="-120"/>
+                        </a:rPr>
+                        <a:t>1 </a:t>
+                      </a:r>
                       <a:r>
                         <a:rPr lang="en-US" sz="1250" b="1" i="1" dirty="0">
                           <a:solidFill>
@@ -8880,7 +8860,7 @@
                           <a:ea typeface="Calibri" pitchFamily="34" charset="-122"/>
                           <a:cs typeface="Calibri" pitchFamily="34" charset="-120"/>
                         </a:rPr>
-                        <a:t>__ / 8</a:t>
+                        <a:t>/ 8</a:t>
                       </a:r>
                       <a:endParaRPr lang="en-US" sz="1250" dirty="0">
                         <a:latin typeface="Calibri" charset="0"/>
@@ -8889,7 +8869,7 @@
                       </a:endParaRPr>
                     </a:p>
                   </a:txBody>
-                  <a:tcPr marL="91440" marR="91440" marT="45720" marB="45720" anchor="ctr">
+                  <a:tcPr anchor="ctr">
                     <a:lnL w="6350" cap="flat" cmpd="sng" algn="ctr">
                       <a:solidFill>
                         <a:srgbClr val="D8DEE9"/>
@@ -8931,6 +8911,11 @@
                     </a:solidFill>
                   </a:tcPr>
                 </a:tc>
+                <a:extLst>
+                  <a:ext uri="{0D108BD9-81ED-4DB2-BD59-A6C34878D82A}">
+                    <a16:rowId xmlns:a16="http://schemas.microsoft.com/office/drawing/2014/main" val="10006"/>
+                  </a:ext>
+                </a:extLst>
               </a:tr>
             </a:tbl>
           </a:graphicData>
@@ -8957,7 +8942,7 @@
           <a:bodyPr wrap="square" lIns="0" tIns="0" rIns="0" bIns="0" rtlCol="0" anchor="ctr"/>
           <a:lstStyle/>
           <a:p>
-            <a:pPr indent="0" marL="0">
+            <a:pPr marL="0" indent="0">
               <a:buNone/>
             </a:pPr>
             <a:r>
@@ -8996,7 +8981,7 @@
           <a:bodyPr wrap="square" lIns="0" tIns="0" rIns="0" bIns="0" rtlCol="0" anchor="ctr"/>
           <a:lstStyle/>
           <a:p>
-            <a:pPr indent="0" marL="0">
+            <a:pPr marL="0" indent="0">
               <a:buNone/>
             </a:pPr>
             <a:r>
@@ -9035,7 +9020,7 @@
           <a:bodyPr wrap="square" lIns="0" tIns="0" rIns="0" bIns="0" rtlCol="0" anchor="ctr"/>
           <a:lstStyle/>
           <a:p>
-            <a:pPr indent="0" marL="0">
+            <a:pPr marL="0" indent="0">
               <a:lnSpc>
                 <a:spcPct val="112000"/>
               </a:lnSpc>
@@ -9052,13 +9037,60 @@
               </a:rPr>
               <a:t>Chunking &gt; everything.  </a:t>
             </a:r>
-            <a:pPr indent="0" marL="0">
+            <a:r>
+              <a:rPr lang="en-US" sz="1300" dirty="0">
+                <a:solidFill>
+                  <a:srgbClr val="1F2933"/>
+                </a:solidFill>
+                <a:latin typeface="Calibri" pitchFamily="34" charset="0"/>
+                <a:ea typeface="Calibri" pitchFamily="34" charset="-122"/>
+                <a:cs typeface="Calibri" pitchFamily="34" charset="-120"/>
+              </a:rPr>
+              <a:t>‘page’ was worst — a whole page is mostly-irrelevant context that buries the answer; tight paragraph chunks with a small overlap gave the best answers.</a:t>
+            </a:r>
+            <a:endParaRPr lang="en-US" sz="1300" dirty="0"/>
+          </a:p>
+        </p:txBody>
+      </p:sp>
+      <p:sp>
+        <p:nvSpPr>
+          <p:cNvPr id="8" name="Text 5"/>
+          <p:cNvSpPr/>
+          <p:nvPr/>
+        </p:nvSpPr>
+        <p:spPr>
+          <a:xfrm>
+            <a:off x="7315200" y="3703320"/>
+            <a:ext cx="4206240" cy="1371600"/>
+          </a:xfrm>
+          <a:prstGeom prst="rect">
+            <a:avLst/>
+          </a:prstGeom>
+          <a:noFill/>
+          <a:ln/>
+        </p:spPr>
+        <p:txBody>
+          <a:bodyPr wrap="square" lIns="0" tIns="0" rIns="0" bIns="0" rtlCol="0" anchor="ctr"/>
+          <a:lstStyle/>
+          <a:p>
+            <a:pPr marL="0" indent="0">
               <a:lnSpc>
                 <a:spcPct val="112000"/>
               </a:lnSpc>
               <a:buNone/>
             </a:pPr>
             <a:r>
+              <a:rPr lang="en-US" sz="1300" b="1" dirty="0">
+                <a:solidFill>
+                  <a:srgbClr val="1F2933"/>
+                </a:solidFill>
+                <a:latin typeface="Calibri" pitchFamily="34" charset="0"/>
+                <a:ea typeface="Calibri" pitchFamily="34" charset="-122"/>
+                <a:cs typeface="Calibri" pitchFamily="34" charset="-120"/>
+              </a:rPr>
+              <a:t>Reader type &gt; size.  </a:t>
+            </a:r>
+            <a:r>
               <a:rPr lang="en-US" sz="1300" dirty="0">
                 <a:solidFill>
                   <a:srgbClr val="1F2933"/>
@@ -9067,7 +9099,7 @@
                 <a:ea typeface="Calibri" pitchFamily="34" charset="-122"/>
                 <a:cs typeface="Calibri" pitchFamily="34" charset="-120"/>
               </a:rPr>
-              <a:t>‘page’ was worst — a whole page is mostly-irrelevant context that buries the answer; tight paragraph chunks with a small overlap gave the best answers.</a:t>
+              <a:t>Flan-T5 (instruction-tuned, seq2seq) extracts the answer from context; GPT-2 fluently continues the prompt without answering.</a:t>
             </a:r>
             <a:endParaRPr lang="en-US" sz="1300" dirty="0"/>
           </a:p>
@@ -9075,66 +9107,7 @@
       </p:sp>
       <p:sp>
         <p:nvSpPr>
-          <p:cNvPr id="8" name="Text 5"/>
-          <p:cNvSpPr/>
-          <p:nvPr/>
-        </p:nvSpPr>
-        <p:spPr>
-          <a:xfrm>
-            <a:off x="7315200" y="3703320"/>
-            <a:ext cx="4206240" cy="1371600"/>
-          </a:xfrm>
-          <a:prstGeom prst="rect">
-            <a:avLst/>
-          </a:prstGeom>
-          <a:noFill/>
-          <a:ln/>
-        </p:spPr>
-        <p:txBody>
-          <a:bodyPr wrap="square" lIns="0" tIns="0" rIns="0" bIns="0" rtlCol="0" anchor="ctr"/>
-          <a:lstStyle/>
-          <a:p>
-            <a:pPr indent="0" marL="0">
-              <a:lnSpc>
-                <a:spcPct val="112000"/>
-              </a:lnSpc>
-              <a:buNone/>
-            </a:pPr>
-            <a:r>
-              <a:rPr lang="en-US" sz="1300" b="1" dirty="0">
-                <a:solidFill>
-                  <a:srgbClr val="1F2933"/>
-                </a:solidFill>
-                <a:latin typeface="Calibri" pitchFamily="34" charset="0"/>
-                <a:ea typeface="Calibri" pitchFamily="34" charset="-122"/>
-                <a:cs typeface="Calibri" pitchFamily="34" charset="-120"/>
-              </a:rPr>
-              <a:t>Reader type &gt; size.  </a:t>
-            </a:r>
-            <a:pPr indent="0" marL="0">
-              <a:lnSpc>
-                <a:spcPct val="112000"/>
-              </a:lnSpc>
-              <a:buNone/>
-            </a:pPr>
-            <a:r>
-              <a:rPr lang="en-US" sz="1300" dirty="0">
-                <a:solidFill>
-                  <a:srgbClr val="1F2933"/>
-                </a:solidFill>
-                <a:latin typeface="Calibri" pitchFamily="34" charset="0"/>
-                <a:ea typeface="Calibri" pitchFamily="34" charset="-122"/>
-                <a:cs typeface="Calibri" pitchFamily="34" charset="-120"/>
-              </a:rPr>
-              <a:t>Flan-T5 (instruction-tuned, seq2seq) extracts the answer from context; GPT-2 fluently continues the prompt without answering.</a:t>
-            </a:r>
-            <a:endParaRPr lang="en-US" sz="1300" dirty="0"/>
-          </a:p>
-        </p:txBody>
-      </p:sp>
-      <p:sp>
-        <p:nvSpPr>
-          <p:cNvPr id="9" name="Text 6"/>
+          <p:cNvPr id="4" name="Text 6"/>
           <p:cNvSpPr/>
           <p:nvPr/>
         </p:nvSpPr>
@@ -9153,7 +9126,7 @@
           <a:bodyPr wrap="square" lIns="0" tIns="0" rIns="0" bIns="0" rtlCol="0" anchor="ctr"/>
           <a:lstStyle/>
           <a:p>
-            <a:pPr indent="0" marL="0">
+            <a:pPr marL="0" indent="0">
               <a:buNone/>
             </a:pPr>
             <a:r>
@@ -9192,7 +9165,7 @@
           <a:bodyPr wrap="square" lIns="0" tIns="0" rIns="0" bIns="0" rtlCol="0" anchor="ctr"/>
           <a:lstStyle/>
           <a:p>
-            <a:pPr algn="r" indent="0" marL="0">
+            <a:pPr marL="0" indent="0" algn="r">
               <a:buNone/>
             </a:pPr>
             <a:r>
@@ -9256,11 +9229,11 @@
           <a:bodyPr wrap="square" lIns="0" tIns="0" rIns="0" bIns="0" rtlCol="0" anchor="ctr"/>
           <a:lstStyle/>
           <a:p>
-            <a:pPr indent="0" marL="0">
+            <a:pPr marL="0" indent="0">
               <a:buNone/>
             </a:pPr>
             <a:r>
-              <a:rPr lang="en-US" sz="1200" b="1" spc="300" kern="0" dirty="0">
+              <a:rPr lang="en-US" sz="1200" b="1" kern="0" spc="300" dirty="0">
                 <a:solidFill>
                   <a:srgbClr val="4C6FA5"/>
                 </a:solidFill>
@@ -9295,7 +9268,7 @@
           <a:bodyPr wrap="square" lIns="0" tIns="0" rIns="0" bIns="0" rtlCol="0" anchor="ctr"/>
           <a:lstStyle/>
           <a:p>
-            <a:pPr indent="0" marL="0">
+            <a:pPr marL="0" indent="0">
               <a:buNone/>
             </a:pPr>
             <a:r>
@@ -9337,13 +9310,20 @@
             <a:prstDash val="solid"/>
           </a:ln>
           <a:effectLst>
-            <a:outerShdw sx="100000" sy="100000" kx="0" ky="0" algn="bl" rotWithShape="0" blurRad="88900" dist="38100" dir="8100000">
+            <a:outerShdw blurRad="88900" dist="38100" dir="8100000" algn="bl" rotWithShape="0">
               <a:srgbClr val="9AA5B5">
                 <a:alpha val="22000"/>
               </a:srgbClr>
             </a:outerShdw>
           </a:effectLst>
         </p:spPr>
+        <p:txBody>
+          <a:bodyPr/>
+          <a:lstStyle/>
+          <a:p>
+            <a:endParaRPr lang="en-US"/>
+          </a:p>
+        </p:txBody>
       </p:sp>
       <p:sp>
         <p:nvSpPr>
@@ -9366,7 +9346,7 @@
           <a:bodyPr wrap="square" lIns="0" tIns="0" rIns="0" bIns="0" rtlCol="0" anchor="ctr"/>
           <a:lstStyle/>
           <a:p>
-            <a:pPr indent="0" marL="0">
+            <a:pPr marL="0" indent="0">
               <a:buNone/>
             </a:pPr>
             <a:r>
@@ -9502,13 +9482,20 @@
             <a:prstDash val="solid"/>
           </a:ln>
           <a:effectLst>
-            <a:outerShdw sx="100000" sy="100000" kx="0" ky="0" algn="bl" rotWithShape="0" blurRad="88900" dist="38100" dir="8100000">
+            <a:outerShdw blurRad="88900" dist="38100" dir="8100000" algn="bl" rotWithShape="0">
               <a:srgbClr val="9AA5B5">
                 <a:alpha val="22000"/>
               </a:srgbClr>
             </a:outerShdw>
           </a:effectLst>
         </p:spPr>
+        <p:txBody>
+          <a:bodyPr/>
+          <a:lstStyle/>
+          <a:p>
+            <a:endParaRPr lang="en-US"/>
+          </a:p>
+        </p:txBody>
       </p:sp>
       <p:sp>
         <p:nvSpPr>
@@ -9531,7 +9518,7 @@
           <a:bodyPr wrap="square" lIns="0" tIns="0" rIns="0" bIns="0" rtlCol="0" anchor="ctr"/>
           <a:lstStyle/>
           <a:p>
-            <a:pPr indent="0" marL="0">
+            <a:pPr marL="0" indent="0">
               <a:buNone/>
             </a:pPr>
             <a:r>
@@ -9688,7 +9675,7 @@
           <a:bodyPr wrap="square" lIns="0" tIns="0" rIns="0" bIns="0" rtlCol="0" anchor="ctr"/>
           <a:lstStyle/>
           <a:p>
-            <a:pPr indent="0" marL="0">
+            <a:pPr marL="0" indent="0">
               <a:buNone/>
             </a:pPr>
             <a:r>
@@ -9727,7 +9714,7 @@
           <a:bodyPr wrap="square" lIns="0" tIns="0" rIns="0" bIns="0" rtlCol="0" anchor="ctr"/>
           <a:lstStyle/>
           <a:p>
-            <a:pPr algn="r" indent="0" marL="0">
+            <a:pPr marL="0" indent="0" algn="r">
               <a:buNone/>
             </a:pPr>
             <a:r>
@@ -10046,4 +10033,319 @@
     </a:ext>
   </a:extLst>
 </a:theme>
+</file>
+
+<file path=ppt/theme/theme2.xml><?xml version="1.0" encoding="utf-8"?>
+<a:theme xmlns:a="http://schemas.openxmlformats.org/drawingml/2006/main" name="Office Theme">
+  <a:themeElements>
+    <a:clrScheme name="Office">
+      <a:dk1>
+        <a:sysClr val="windowText" lastClr="000000"/>
+      </a:dk1>
+      <a:lt1>
+        <a:sysClr val="window" lastClr="FFFFFF"/>
+      </a:lt1>
+      <a:dk2>
+        <a:srgbClr val="0E2841"/>
+      </a:dk2>
+      <a:lt2>
+        <a:srgbClr val="E8E8E8"/>
+      </a:lt2>
+      <a:accent1>
+        <a:srgbClr val="156082"/>
+      </a:accent1>
+      <a:accent2>
+        <a:srgbClr val="E97132"/>
+      </a:accent2>
+      <a:accent3>
+        <a:srgbClr val="196B24"/>
+      </a:accent3>
+      <a:accent4>
+        <a:srgbClr val="0F9ED5"/>
+      </a:accent4>
+      <a:accent5>
+        <a:srgbClr val="A02B93"/>
+      </a:accent5>
+      <a:accent6>
+        <a:srgbClr val="4EA72E"/>
+      </a:accent6>
+      <a:hlink>
+        <a:srgbClr val="467886"/>
+      </a:hlink>
+      <a:folHlink>
+        <a:srgbClr val="96607D"/>
+      </a:folHlink>
+    </a:clrScheme>
+    <a:fontScheme name="Office">
+      <a:majorFont>
+        <a:latin typeface="Aptos Display" panose="02110004020202020204"/>
+        <a:ea typeface=""/>
+        <a:cs typeface=""/>
+        <a:font script="Jpan" typeface="游ゴシック Light"/>
+        <a:font script="Hang" typeface="맑은 고딕"/>
+        <a:font script="Hans" typeface="等线 Light"/>
+        <a:font script="Hant" typeface="新細明體"/>
+        <a:font script="Arab" typeface="Times New Roman"/>
+        <a:font script="Hebr" typeface="Times New Roman"/>
+        <a:font script="Thai" typeface="Angsana New"/>
+        <a:font script="Ethi" typeface="Nyala"/>
+        <a:font script="Beng" typeface="Vrinda"/>
+        <a:font script="Gujr" typeface="Shruti"/>
+        <a:font script="Khmr" typeface="MoolBoran"/>
+        <a:font script="Knda" typeface="Tunga"/>
+        <a:font script="Guru" typeface="Raavi"/>
+        <a:font script="Cans" typeface="Euphemia"/>
+        <a:font script="Cher" typeface="Plantagenet Cherokee"/>
+        <a:font script="Yiii" typeface="Microsoft Yi Baiti"/>
+        <a:font script="Tibt" typeface="Microsoft Himalaya"/>
+        <a:font script="Thaa" typeface="MV Boli"/>
+        <a:font script="Deva" typeface="Mangal"/>
+        <a:font script="Telu" typeface="Gautami"/>
+        <a:font script="Taml" typeface="Latha"/>
+        <a:font script="Syrc" typeface="Estrangelo Edessa"/>
+        <a:font script="Orya" typeface="Kalinga"/>
+        <a:font script="Mlym" typeface="Kartika"/>
+        <a:font script="Laoo" typeface="DokChampa"/>
+        <a:font script="Sinh" typeface="Iskoola Pota"/>
+        <a:font script="Mong" typeface="Mongolian Baiti"/>
+        <a:font script="Viet" typeface="Times New Roman"/>
+        <a:font script="Uigh" typeface="Microsoft Uighur"/>
+        <a:font script="Geor" typeface="Sylfaen"/>
+        <a:font script="Armn" typeface="Arial"/>
+        <a:font script="Bugi" typeface="Leelawadee UI"/>
+        <a:font script="Bopo" typeface="Microsoft JhengHei"/>
+        <a:font script="Java" typeface="Javanese Text"/>
+        <a:font script="Lisu" typeface="Segoe UI"/>
+        <a:font script="Mymr" typeface="Myanmar Text"/>
+        <a:font script="Nkoo" typeface="Ebrima"/>
+        <a:font script="Olck" typeface="Nirmala UI"/>
+        <a:font script="Osma" typeface="Ebrima"/>
+        <a:font script="Phag" typeface="Phagspa"/>
+        <a:font script="Syrn" typeface="Estrangelo Edessa"/>
+        <a:font script="Syrj" typeface="Estrangelo Edessa"/>
+        <a:font script="Syre" typeface="Estrangelo Edessa"/>
+        <a:font script="Sora" typeface="Nirmala UI"/>
+        <a:font script="Tale" typeface="Microsoft Tai Le"/>
+        <a:font script="Talu" typeface="Microsoft New Tai Lue"/>
+        <a:font script="Tfng" typeface="Ebrima"/>
+      </a:majorFont>
+      <a:minorFont>
+        <a:latin typeface="Aptos" panose="02110004020202020204"/>
+        <a:ea typeface=""/>
+        <a:cs typeface=""/>
+        <a:font script="Jpan" typeface="游ゴシック"/>
+        <a:font script="Hang" typeface="맑은 고딕"/>
+        <a:font script="Hans" typeface="等线"/>
+        <a:font script="Hant" typeface="新細明體"/>
+        <a:font script="Arab" typeface="Arial"/>
+        <a:font script="Hebr" typeface="Arial"/>
+        <a:font script="Thai" typeface="Cordia New"/>
+        <a:font script="Ethi" typeface="Nyala"/>
+        <a:font script="Beng" typeface="Vrinda"/>
+        <a:font script="Gujr" typeface="Shruti"/>
+        <a:font script="Khmr" typeface="DaunPenh"/>
+        <a:font script="Knda" typeface="Tunga"/>
+        <a:font script="Guru" typeface="Raavi"/>
+        <a:font script="Cans" typeface="Euphemia"/>
+        <a:font script="Cher" typeface="Plantagenet Cherokee"/>
+        <a:font script="Yiii" typeface="Microsoft Yi Baiti"/>
+        <a:font script="Tibt" typeface="Microsoft Himalaya"/>
+        <a:font script="Thaa" typeface="MV Boli"/>
+        <a:font script="Deva" typeface="Mangal"/>
+        <a:font script="Telu" typeface="Gautami"/>
+        <a:font script="Taml" typeface="Latha"/>
+        <a:font script="Syrc" typeface="Estrangelo Edessa"/>
+        <a:font script="Orya" typeface="Kalinga"/>
+        <a:font script="Mlym" typeface="Kartika"/>
+        <a:font script="Laoo" typeface="DokChampa"/>
+        <a:font script="Sinh" typeface="Iskoola Pota"/>
+        <a:font script="Mong" typeface="Mongolian Baiti"/>
+        <a:font script="Viet" typeface="Arial"/>
+        <a:font script="Uigh" typeface="Microsoft Uighur"/>
+        <a:font script="Geor" typeface="Sylfaen"/>
+        <a:font script="Armn" typeface="Arial"/>
+        <a:font script="Bugi" typeface="Leelawadee UI"/>
+        <a:font script="Bopo" typeface="Microsoft JhengHei"/>
+        <a:font script="Java" typeface="Javanese Text"/>
+        <a:font script="Lisu" typeface="Segoe UI"/>
+        <a:font script="Mymr" typeface="Myanmar Text"/>
+        <a:font script="Nkoo" typeface="Ebrima"/>
+        <a:font script="Olck" typeface="Nirmala UI"/>
+        <a:font script="Osma" typeface="Ebrima"/>
+        <a:font script="Phag" typeface="Phagspa"/>
+        <a:font script="Syrn" typeface="Estrangelo Edessa"/>
+        <a:font script="Syrj" typeface="Estrangelo Edessa"/>
+        <a:font script="Syre" typeface="Estrangelo Edessa"/>
+        <a:font script="Sora" typeface="Nirmala UI"/>
+        <a:font script="Tale" typeface="Microsoft Tai Le"/>
+        <a:font script="Talu" typeface="Microsoft New Tai Lue"/>
+        <a:font script="Tfng" typeface="Ebrima"/>
+      </a:minorFont>
+    </a:fontScheme>
+    <a:fmtScheme name="Office">
+      <a:fillStyleLst>
+        <a:solidFill>
+          <a:schemeClr val="phClr"/>
+        </a:solidFill>
+        <a:gradFill rotWithShape="1">
+          <a:gsLst>
+            <a:gs pos="0">
+              <a:schemeClr val="phClr">
+                <a:lumMod val="110000"/>
+                <a:satMod val="105000"/>
+                <a:tint val="67000"/>
+              </a:schemeClr>
+            </a:gs>
+            <a:gs pos="50000">
+              <a:schemeClr val="phClr">
+                <a:lumMod val="105000"/>
+                <a:satMod val="103000"/>
+                <a:tint val="73000"/>
+              </a:schemeClr>
+            </a:gs>
+            <a:gs pos="100000">
+              <a:schemeClr val="phClr">
+                <a:lumMod val="105000"/>
+                <a:satMod val="109000"/>
+                <a:tint val="81000"/>
+              </a:schemeClr>
+            </a:gs>
+          </a:gsLst>
+          <a:lin ang="5400000" scaled="0"/>
+        </a:gradFill>
+        <a:gradFill rotWithShape="1">
+          <a:gsLst>
+            <a:gs pos="0">
+              <a:schemeClr val="phClr">
+                <a:satMod val="103000"/>
+                <a:lumMod val="102000"/>
+                <a:tint val="94000"/>
+              </a:schemeClr>
+            </a:gs>
+            <a:gs pos="50000">
+              <a:schemeClr val="phClr">
+                <a:satMod val="110000"/>
+                <a:lumMod val="100000"/>
+                <a:shade val="100000"/>
+              </a:schemeClr>
+            </a:gs>
+            <a:gs pos="100000">
+              <a:schemeClr val="phClr">
+                <a:lumMod val="99000"/>
+                <a:satMod val="120000"/>
+                <a:shade val="78000"/>
+              </a:schemeClr>
+            </a:gs>
+          </a:gsLst>
+          <a:lin ang="5400000" scaled="0"/>
+        </a:gradFill>
+      </a:fillStyleLst>
+      <a:lnStyleLst>
+        <a:ln w="12700" cap="flat" cmpd="sng" algn="ctr">
+          <a:solidFill>
+            <a:schemeClr val="phClr"/>
+          </a:solidFill>
+          <a:prstDash val="solid"/>
+          <a:miter lim="800000"/>
+        </a:ln>
+        <a:ln w="19050" cap="flat" cmpd="sng" algn="ctr">
+          <a:solidFill>
+            <a:schemeClr val="phClr"/>
+          </a:solidFill>
+          <a:prstDash val="solid"/>
+          <a:miter lim="800000"/>
+        </a:ln>
+        <a:ln w="25400" cap="flat" cmpd="sng" algn="ctr">
+          <a:solidFill>
+            <a:schemeClr val="phClr"/>
+          </a:solidFill>
+          <a:prstDash val="solid"/>
+          <a:miter lim="800000"/>
+        </a:ln>
+      </a:lnStyleLst>
+      <a:effectStyleLst>
+        <a:effectStyle>
+          <a:effectLst/>
+        </a:effectStyle>
+        <a:effectStyle>
+          <a:effectLst/>
+        </a:effectStyle>
+        <a:effectStyle>
+          <a:effectLst>
+            <a:outerShdw blurRad="57150" dist="19050" dir="5400000" algn="ctr" rotWithShape="0">
+              <a:srgbClr val="000000">
+                <a:alpha val="63000"/>
+              </a:srgbClr>
+            </a:outerShdw>
+          </a:effectLst>
+        </a:effectStyle>
+      </a:effectStyleLst>
+      <a:bgFillStyleLst>
+        <a:solidFill>
+          <a:schemeClr val="phClr"/>
+        </a:solidFill>
+        <a:solidFill>
+          <a:schemeClr val="phClr">
+            <a:tint val="95000"/>
+            <a:satMod val="170000"/>
+          </a:schemeClr>
+        </a:solidFill>
+        <a:gradFill rotWithShape="1">
+          <a:gsLst>
+            <a:gs pos="0">
+              <a:schemeClr val="phClr">
+                <a:tint val="93000"/>
+                <a:satMod val="150000"/>
+                <a:shade val="98000"/>
+                <a:lumMod val="102000"/>
+              </a:schemeClr>
+            </a:gs>
+            <a:gs pos="50000">
+              <a:schemeClr val="phClr">
+                <a:tint val="98000"/>
+                <a:satMod val="130000"/>
+                <a:shade val="90000"/>
+                <a:lumMod val="103000"/>
+              </a:schemeClr>
+            </a:gs>
+            <a:gs pos="100000">
+              <a:schemeClr val="phClr">
+                <a:shade val="63000"/>
+                <a:satMod val="120000"/>
+              </a:schemeClr>
+            </a:gs>
+          </a:gsLst>
+          <a:lin ang="5400000" scaled="0"/>
+        </a:gradFill>
+      </a:bgFillStyleLst>
+    </a:fmtScheme>
+  </a:themeElements>
+  <a:objectDefaults>
+    <a:lnDef>
+      <a:spPr/>
+      <a:bodyPr/>
+      <a:lstStyle/>
+      <a:style>
+        <a:lnRef idx="2">
+          <a:schemeClr val="accent1"/>
+        </a:lnRef>
+        <a:fillRef idx="0">
+          <a:schemeClr val="accent1"/>
+        </a:fillRef>
+        <a:effectRef idx="1">
+          <a:schemeClr val="accent1"/>
+        </a:effectRef>
+        <a:fontRef idx="minor">
+          <a:schemeClr val="tx1"/>
+        </a:fontRef>
+      </a:style>
+    </a:lnDef>
+  </a:objectDefaults>
+  <a:extraClrSchemeLst/>
+  <a:extLst>
+    <a:ext uri="{05A4C25C-085E-4340-85A3-A5531E510DB2}">
+      <thm15:themeFamily xmlns:thm15="http://schemas.microsoft.com/office/thememl/2012/main" name="Office Theme" id="{2E142A2C-CD16-42D6-873A-C26D2A0506FA}" vid="{1BDDFF52-6CD6-40A5-AB3C-68EB2F1E4D0A}"/>
+    </a:ext>
+  </a:extLst>
+</a:theme>
 </file>